--- a/media/module3/slides.pptx
+++ b/media/module3/slides.pptx
@@ -66,6 +66,20 @@
     <p:sldId id="314" r:id="rId66"/>
     <p:sldId id="315" r:id="rId67"/>
     <p:sldId id="316" r:id="rId68"/>
+    <p:sldId id="317" r:id="rId69"/>
+    <p:sldId id="318" r:id="rId70"/>
+    <p:sldId id="319" r:id="rId71"/>
+    <p:sldId id="320" r:id="rId72"/>
+    <p:sldId id="321" r:id="rId73"/>
+    <p:sldId id="322" r:id="rId74"/>
+    <p:sldId id="323" r:id="rId75"/>
+    <p:sldId id="324" r:id="rId76"/>
+    <p:sldId id="325" r:id="rId77"/>
+    <p:sldId id="326" r:id="rId78"/>
+    <p:sldId id="327" r:id="rId79"/>
+    <p:sldId id="328" r:id="rId80"/>
+    <p:sldId id="329" r:id="rId81"/>
+    <p:sldId id="330" r:id="rId82"/>
   </p:sldIdLst>
   <p:sldSz cx="12191695" cy="6858000" type="screen4x3"/>
   <p:notesSz cx="6858000" cy="9144000"/>
@@ -3527,6 +3541,76 @@
 </p:notes>
 </file>
 
+<file path=ppt/notesSlides/notesSlide49.xml><?xml version="1.0" encoding="utf-8"?>
+<p:notes xmlns:a="http://schemas.openxmlformats.org/drawingml/2006/main" xmlns:p="http://schemas.openxmlformats.org/presentationml/2006/main" xmlns:r="http://schemas.openxmlformats.org/officeDocument/2006/relationships">
+  <p:cSld>
+    <p:spTree>
+      <p:nvGrpSpPr>
+        <p:cNvPr id="1" name=""/>
+        <p:cNvGrpSpPr/>
+        <p:nvPr/>
+      </p:nvGrpSpPr>
+      <p:grpSpPr>
+        <a:xfrm>
+          <a:off x="0" y="0"/>
+          <a:ext cx="0" cy="0"/>
+          <a:chOff x="0" y="0"/>
+          <a:chExt cx="0" cy="0"/>
+        </a:xfrm>
+      </p:grpSpPr>
+      <p:sp>
+        <p:nvSpPr>
+          <p:cNvPr id="2" name="Slide Image Placeholder 1"/>
+          <p:cNvSpPr>
+            <a:spLocks noGrp="1"/>
+          </p:cNvSpPr>
+          <p:nvPr>
+            <p:ph type="sldImg" idx="2"/>
+          </p:nvPr>
+        </p:nvSpPr>
+        <p:spPr/>
+      </p:sp>
+      <p:sp>
+        <p:nvSpPr>
+          <p:cNvPr id="3" name="Notes Placeholder 2"/>
+          <p:cNvSpPr>
+            <a:spLocks noGrp="1"/>
+          </p:cNvSpPr>
+          <p:nvPr>
+            <p:ph type="body" idx="3" sz="quarter"/>
+          </p:nvPr>
+        </p:nvSpPr>
+        <p:spPr/>
+        <p:txBody>
+          <a:bodyPr/>
+          <a:lstStyle/>
+          <a:p>
+            <a:r>
+              <a:t>module3/examples/class_hierarchy/README.md</a:t>
+            </a:r>
+          </a:p>
+        </p:txBody>
+      </p:sp>
+      <p:sp>
+        <p:nvSpPr>
+          <p:cNvPr id="4" name="Slide Number Placeholder 3"/>
+          <p:cNvSpPr>
+            <a:spLocks noGrp="1"/>
+          </p:cNvSpPr>
+          <p:nvPr>
+            <p:ph type="sldNum" idx="5" sz="quarter"/>
+          </p:nvPr>
+        </p:nvSpPr>
+        <p:spPr/>
+      </p:sp>
+    </p:spTree>
+  </p:cSld>
+  <p:clrMapOvr>
+    <a:masterClrMapping/>
+  </p:clrMapOvr>
+</p:notes>
+</file>
+
 <file path=ppt/notesSlides/notesSlide5.xml><?xml version="1.0" encoding="utf-8"?>
 <p:notes xmlns:a="http://schemas.openxmlformats.org/drawingml/2006/main" xmlns:p="http://schemas.openxmlformats.org/presentationml/2006/main" xmlns:r="http://schemas.openxmlformats.org/officeDocument/2006/relationships">
   <p:cSld>
@@ -3573,6 +3657,706 @@
           <a:p>
             <a:r>
               <a:t>From MODULE3 Topics Covered.</a:t>
+            </a:r>
+          </a:p>
+        </p:txBody>
+      </p:sp>
+      <p:sp>
+        <p:nvSpPr>
+          <p:cNvPr id="4" name="Slide Number Placeholder 3"/>
+          <p:cNvSpPr>
+            <a:spLocks noGrp="1"/>
+          </p:cNvSpPr>
+          <p:nvPr>
+            <p:ph type="sldNum" idx="5" sz="quarter"/>
+          </p:nvPr>
+        </p:nvSpPr>
+        <p:spPr/>
+      </p:sp>
+    </p:spTree>
+  </p:cSld>
+  <p:clrMapOvr>
+    <a:masterClrMapping/>
+  </p:clrMapOvr>
+</p:notes>
+</file>
+
+<file path=ppt/notesSlides/notesSlide50.xml><?xml version="1.0" encoding="utf-8"?>
+<p:notes xmlns:a="http://schemas.openxmlformats.org/drawingml/2006/main" xmlns:p="http://schemas.openxmlformats.org/presentationml/2006/main" xmlns:r="http://schemas.openxmlformats.org/officeDocument/2006/relationships">
+  <p:cSld>
+    <p:spTree>
+      <p:nvGrpSpPr>
+        <p:cNvPr id="1" name=""/>
+        <p:cNvGrpSpPr/>
+        <p:nvPr/>
+      </p:nvGrpSpPr>
+      <p:grpSpPr>
+        <a:xfrm>
+          <a:off x="0" y="0"/>
+          <a:ext cx="0" cy="0"/>
+          <a:chOff x="0" y="0"/>
+          <a:chExt cx="0" cy="0"/>
+        </a:xfrm>
+      </p:grpSpPr>
+      <p:sp>
+        <p:nvSpPr>
+          <p:cNvPr id="2" name="Slide Image Placeholder 1"/>
+          <p:cNvSpPr>
+            <a:spLocks noGrp="1"/>
+          </p:cNvSpPr>
+          <p:nvPr>
+            <p:ph type="sldImg" idx="2"/>
+          </p:nvPr>
+        </p:nvSpPr>
+        <p:spPr/>
+      </p:sp>
+      <p:sp>
+        <p:nvSpPr>
+          <p:cNvPr id="3" name="Notes Placeholder 2"/>
+          <p:cNvSpPr>
+            <a:spLocks noGrp="1"/>
+          </p:cNvSpPr>
+          <p:nvPr>
+            <p:ph type="body" idx="3" sz="quarter"/>
+          </p:nvPr>
+        </p:nvSpPr>
+        <p:spPr/>
+        <p:txBody>
+          <a:bodyPr/>
+          <a:lstStyle/>
+          <a:p>
+            <a:r>
+              <a:t>Hands-on: module3/examples/class_hierarchy/</a:t>
+            </a:r>
+          </a:p>
+        </p:txBody>
+      </p:sp>
+      <p:sp>
+        <p:nvSpPr>
+          <p:cNvPr id="4" name="Slide Number Placeholder 3"/>
+          <p:cNvSpPr>
+            <a:spLocks noGrp="1"/>
+          </p:cNvSpPr>
+          <p:nvPr>
+            <p:ph type="sldNum" idx="5" sz="quarter"/>
+          </p:nvPr>
+        </p:nvSpPr>
+        <p:spPr/>
+      </p:sp>
+    </p:spTree>
+  </p:cSld>
+  <p:clrMapOvr>
+    <a:masterClrMapping/>
+  </p:clrMapOvr>
+</p:notes>
+</file>
+
+<file path=ppt/notesSlides/notesSlide51.xml><?xml version="1.0" encoding="utf-8"?>
+<p:notes xmlns:a="http://schemas.openxmlformats.org/drawingml/2006/main" xmlns:p="http://schemas.openxmlformats.org/presentationml/2006/main" xmlns:r="http://schemas.openxmlformats.org/officeDocument/2006/relationships">
+  <p:cSld>
+    <p:spTree>
+      <p:nvGrpSpPr>
+        <p:cNvPr id="1" name=""/>
+        <p:cNvGrpSpPr/>
+        <p:nvPr/>
+      </p:nvGrpSpPr>
+      <p:grpSpPr>
+        <a:xfrm>
+          <a:off x="0" y="0"/>
+          <a:ext cx="0" cy="0"/>
+          <a:chOff x="0" y="0"/>
+          <a:chExt cx="0" cy="0"/>
+        </a:xfrm>
+      </p:grpSpPr>
+      <p:sp>
+        <p:nvSpPr>
+          <p:cNvPr id="2" name="Slide Image Placeholder 1"/>
+          <p:cNvSpPr>
+            <a:spLocks noGrp="1"/>
+          </p:cNvSpPr>
+          <p:nvPr>
+            <p:ph type="sldImg" idx="2"/>
+          </p:nvPr>
+        </p:nvSpPr>
+        <p:spPr/>
+      </p:sp>
+      <p:sp>
+        <p:nvSpPr>
+          <p:cNvPr id="3" name="Notes Placeholder 2"/>
+          <p:cNvSpPr>
+            <a:spLocks noGrp="1"/>
+          </p:cNvSpPr>
+          <p:nvPr>
+            <p:ph type="body" idx="3" sz="quarter"/>
+          </p:nvPr>
+        </p:nvSpPr>
+        <p:spPr/>
+        <p:txBody>
+          <a:bodyPr/>
+          <a:lstStyle/>
+          <a:p>
+            <a:r>
+              <a:t>module3/examples/phases/README.md</a:t>
+            </a:r>
+          </a:p>
+        </p:txBody>
+      </p:sp>
+      <p:sp>
+        <p:nvSpPr>
+          <p:cNvPr id="4" name="Slide Number Placeholder 3"/>
+          <p:cNvSpPr>
+            <a:spLocks noGrp="1"/>
+          </p:cNvSpPr>
+          <p:nvPr>
+            <p:ph type="sldNum" idx="5" sz="quarter"/>
+          </p:nvPr>
+        </p:nvSpPr>
+        <p:spPr/>
+      </p:sp>
+    </p:spTree>
+  </p:cSld>
+  <p:clrMapOvr>
+    <a:masterClrMapping/>
+  </p:clrMapOvr>
+</p:notes>
+</file>
+
+<file path=ppt/notesSlides/notesSlide52.xml><?xml version="1.0" encoding="utf-8"?>
+<p:notes xmlns:a="http://schemas.openxmlformats.org/drawingml/2006/main" xmlns:p="http://schemas.openxmlformats.org/presentationml/2006/main" xmlns:r="http://schemas.openxmlformats.org/officeDocument/2006/relationships">
+  <p:cSld>
+    <p:spTree>
+      <p:nvGrpSpPr>
+        <p:cNvPr id="1" name=""/>
+        <p:cNvGrpSpPr/>
+        <p:nvPr/>
+      </p:nvGrpSpPr>
+      <p:grpSpPr>
+        <a:xfrm>
+          <a:off x="0" y="0"/>
+          <a:ext cx="0" cy="0"/>
+          <a:chOff x="0" y="0"/>
+          <a:chExt cx="0" cy="0"/>
+        </a:xfrm>
+      </p:grpSpPr>
+      <p:sp>
+        <p:nvSpPr>
+          <p:cNvPr id="2" name="Slide Image Placeholder 1"/>
+          <p:cNvSpPr>
+            <a:spLocks noGrp="1"/>
+          </p:cNvSpPr>
+          <p:nvPr>
+            <p:ph type="sldImg" idx="2"/>
+          </p:nvPr>
+        </p:nvSpPr>
+        <p:spPr/>
+      </p:sp>
+      <p:sp>
+        <p:nvSpPr>
+          <p:cNvPr id="3" name="Notes Placeholder 2"/>
+          <p:cNvSpPr>
+            <a:spLocks noGrp="1"/>
+          </p:cNvSpPr>
+          <p:nvPr>
+            <p:ph type="body" idx="3" sz="quarter"/>
+          </p:nvPr>
+        </p:nvSpPr>
+        <p:spPr/>
+        <p:txBody>
+          <a:bodyPr/>
+          <a:lstStyle/>
+          <a:p>
+            <a:r>
+              <a:t>Hands-on: module3/examples/phases/</a:t>
+            </a:r>
+          </a:p>
+        </p:txBody>
+      </p:sp>
+      <p:sp>
+        <p:nvSpPr>
+          <p:cNvPr id="4" name="Slide Number Placeholder 3"/>
+          <p:cNvSpPr>
+            <a:spLocks noGrp="1"/>
+          </p:cNvSpPr>
+          <p:nvPr>
+            <p:ph type="sldNum" idx="5" sz="quarter"/>
+          </p:nvPr>
+        </p:nvSpPr>
+        <p:spPr/>
+      </p:sp>
+    </p:spTree>
+  </p:cSld>
+  <p:clrMapOvr>
+    <a:masterClrMapping/>
+  </p:clrMapOvr>
+</p:notes>
+</file>
+
+<file path=ppt/notesSlides/notesSlide53.xml><?xml version="1.0" encoding="utf-8"?>
+<p:notes xmlns:a="http://schemas.openxmlformats.org/drawingml/2006/main" xmlns:p="http://schemas.openxmlformats.org/presentationml/2006/main" xmlns:r="http://schemas.openxmlformats.org/officeDocument/2006/relationships">
+  <p:cSld>
+    <p:spTree>
+      <p:nvGrpSpPr>
+        <p:cNvPr id="1" name=""/>
+        <p:cNvGrpSpPr/>
+        <p:nvPr/>
+      </p:nvGrpSpPr>
+      <p:grpSpPr>
+        <a:xfrm>
+          <a:off x="0" y="0"/>
+          <a:ext cx="0" cy="0"/>
+          <a:chOff x="0" y="0"/>
+          <a:chExt cx="0" cy="0"/>
+        </a:xfrm>
+      </p:grpSpPr>
+      <p:sp>
+        <p:nvSpPr>
+          <p:cNvPr id="2" name="Slide Image Placeholder 1"/>
+          <p:cNvSpPr>
+            <a:spLocks noGrp="1"/>
+          </p:cNvSpPr>
+          <p:nvPr>
+            <p:ph type="sldImg" idx="2"/>
+          </p:nvPr>
+        </p:nvSpPr>
+        <p:spPr/>
+      </p:sp>
+      <p:sp>
+        <p:nvSpPr>
+          <p:cNvPr id="3" name="Notes Placeholder 2"/>
+          <p:cNvSpPr>
+            <a:spLocks noGrp="1"/>
+          </p:cNvSpPr>
+          <p:nvPr>
+            <p:ph type="body" idx="3" sz="quarter"/>
+          </p:nvPr>
+        </p:nvSpPr>
+        <p:spPr/>
+        <p:txBody>
+          <a:bodyPr/>
+          <a:lstStyle/>
+          <a:p>
+            <a:r>
+              <a:t>module3/examples/reporting/README.md</a:t>
+            </a:r>
+          </a:p>
+        </p:txBody>
+      </p:sp>
+      <p:sp>
+        <p:nvSpPr>
+          <p:cNvPr id="4" name="Slide Number Placeholder 3"/>
+          <p:cNvSpPr>
+            <a:spLocks noGrp="1"/>
+          </p:cNvSpPr>
+          <p:nvPr>
+            <p:ph type="sldNum" idx="5" sz="quarter"/>
+          </p:nvPr>
+        </p:nvSpPr>
+        <p:spPr/>
+      </p:sp>
+    </p:spTree>
+  </p:cSld>
+  <p:clrMapOvr>
+    <a:masterClrMapping/>
+  </p:clrMapOvr>
+</p:notes>
+</file>
+
+<file path=ppt/notesSlides/notesSlide54.xml><?xml version="1.0" encoding="utf-8"?>
+<p:notes xmlns:a="http://schemas.openxmlformats.org/drawingml/2006/main" xmlns:p="http://schemas.openxmlformats.org/presentationml/2006/main" xmlns:r="http://schemas.openxmlformats.org/officeDocument/2006/relationships">
+  <p:cSld>
+    <p:spTree>
+      <p:nvGrpSpPr>
+        <p:cNvPr id="1" name=""/>
+        <p:cNvGrpSpPr/>
+        <p:nvPr/>
+      </p:nvGrpSpPr>
+      <p:grpSpPr>
+        <a:xfrm>
+          <a:off x="0" y="0"/>
+          <a:ext cx="0" cy="0"/>
+          <a:chOff x="0" y="0"/>
+          <a:chExt cx="0" cy="0"/>
+        </a:xfrm>
+      </p:grpSpPr>
+      <p:sp>
+        <p:nvSpPr>
+          <p:cNvPr id="2" name="Slide Image Placeholder 1"/>
+          <p:cNvSpPr>
+            <a:spLocks noGrp="1"/>
+          </p:cNvSpPr>
+          <p:nvPr>
+            <p:ph type="sldImg" idx="2"/>
+          </p:nvPr>
+        </p:nvSpPr>
+        <p:spPr/>
+      </p:sp>
+      <p:sp>
+        <p:nvSpPr>
+          <p:cNvPr id="3" name="Notes Placeholder 2"/>
+          <p:cNvSpPr>
+            <a:spLocks noGrp="1"/>
+          </p:cNvSpPr>
+          <p:nvPr>
+            <p:ph type="body" idx="3" sz="quarter"/>
+          </p:nvPr>
+        </p:nvSpPr>
+        <p:spPr/>
+        <p:txBody>
+          <a:bodyPr/>
+          <a:lstStyle/>
+          <a:p>
+            <a:r>
+              <a:t>Hands-on: module3/examples/reporting/</a:t>
+            </a:r>
+          </a:p>
+        </p:txBody>
+      </p:sp>
+      <p:sp>
+        <p:nvSpPr>
+          <p:cNvPr id="4" name="Slide Number Placeholder 3"/>
+          <p:cNvSpPr>
+            <a:spLocks noGrp="1"/>
+          </p:cNvSpPr>
+          <p:nvPr>
+            <p:ph type="sldNum" idx="5" sz="quarter"/>
+          </p:nvPr>
+        </p:nvSpPr>
+        <p:spPr/>
+      </p:sp>
+    </p:spTree>
+  </p:cSld>
+  <p:clrMapOvr>
+    <a:masterClrMapping/>
+  </p:clrMapOvr>
+</p:notes>
+</file>
+
+<file path=ppt/notesSlides/notesSlide55.xml><?xml version="1.0" encoding="utf-8"?>
+<p:notes xmlns:a="http://schemas.openxmlformats.org/drawingml/2006/main" xmlns:p="http://schemas.openxmlformats.org/presentationml/2006/main" xmlns:r="http://schemas.openxmlformats.org/officeDocument/2006/relationships">
+  <p:cSld>
+    <p:spTree>
+      <p:nvGrpSpPr>
+        <p:cNvPr id="1" name=""/>
+        <p:cNvGrpSpPr/>
+        <p:nvPr/>
+      </p:nvGrpSpPr>
+      <p:grpSpPr>
+        <a:xfrm>
+          <a:off x="0" y="0"/>
+          <a:ext cx="0" cy="0"/>
+          <a:chOff x="0" y="0"/>
+          <a:chExt cx="0" cy="0"/>
+        </a:xfrm>
+      </p:grpSpPr>
+      <p:sp>
+        <p:nvSpPr>
+          <p:cNvPr id="2" name="Slide Image Placeholder 1"/>
+          <p:cNvSpPr>
+            <a:spLocks noGrp="1"/>
+          </p:cNvSpPr>
+          <p:nvPr>
+            <p:ph type="sldImg" idx="2"/>
+          </p:nvPr>
+        </p:nvSpPr>
+        <p:spPr/>
+      </p:sp>
+      <p:sp>
+        <p:nvSpPr>
+          <p:cNvPr id="3" name="Notes Placeholder 2"/>
+          <p:cNvSpPr>
+            <a:spLocks noGrp="1"/>
+          </p:cNvSpPr>
+          <p:nvPr>
+            <p:ph type="body" idx="3" sz="quarter"/>
+          </p:nvPr>
+        </p:nvSpPr>
+        <p:spPr/>
+        <p:txBody>
+          <a:bodyPr/>
+          <a:lstStyle/>
+          <a:p>
+            <a:r>
+              <a:t>module3/examples/configdb/README.md</a:t>
+            </a:r>
+          </a:p>
+        </p:txBody>
+      </p:sp>
+      <p:sp>
+        <p:nvSpPr>
+          <p:cNvPr id="4" name="Slide Number Placeholder 3"/>
+          <p:cNvSpPr>
+            <a:spLocks noGrp="1"/>
+          </p:cNvSpPr>
+          <p:nvPr>
+            <p:ph type="sldNum" idx="5" sz="quarter"/>
+          </p:nvPr>
+        </p:nvSpPr>
+        <p:spPr/>
+      </p:sp>
+    </p:spTree>
+  </p:cSld>
+  <p:clrMapOvr>
+    <a:masterClrMapping/>
+  </p:clrMapOvr>
+</p:notes>
+</file>
+
+<file path=ppt/notesSlides/notesSlide56.xml><?xml version="1.0" encoding="utf-8"?>
+<p:notes xmlns:a="http://schemas.openxmlformats.org/drawingml/2006/main" xmlns:p="http://schemas.openxmlformats.org/presentationml/2006/main" xmlns:r="http://schemas.openxmlformats.org/officeDocument/2006/relationships">
+  <p:cSld>
+    <p:spTree>
+      <p:nvGrpSpPr>
+        <p:cNvPr id="1" name=""/>
+        <p:cNvGrpSpPr/>
+        <p:nvPr/>
+      </p:nvGrpSpPr>
+      <p:grpSpPr>
+        <a:xfrm>
+          <a:off x="0" y="0"/>
+          <a:ext cx="0" cy="0"/>
+          <a:chOff x="0" y="0"/>
+          <a:chExt cx="0" cy="0"/>
+        </a:xfrm>
+      </p:grpSpPr>
+      <p:sp>
+        <p:nvSpPr>
+          <p:cNvPr id="2" name="Slide Image Placeholder 1"/>
+          <p:cNvSpPr>
+            <a:spLocks noGrp="1"/>
+          </p:cNvSpPr>
+          <p:nvPr>
+            <p:ph type="sldImg" idx="2"/>
+          </p:nvPr>
+        </p:nvSpPr>
+        <p:spPr/>
+      </p:sp>
+      <p:sp>
+        <p:nvSpPr>
+          <p:cNvPr id="3" name="Notes Placeholder 2"/>
+          <p:cNvSpPr>
+            <a:spLocks noGrp="1"/>
+          </p:cNvSpPr>
+          <p:nvPr>
+            <p:ph type="body" idx="3" sz="quarter"/>
+          </p:nvPr>
+        </p:nvSpPr>
+        <p:spPr/>
+        <p:txBody>
+          <a:bodyPr/>
+          <a:lstStyle/>
+          <a:p>
+            <a:r>
+              <a:t>Hands-on: module3/examples/configdb/</a:t>
+            </a:r>
+          </a:p>
+        </p:txBody>
+      </p:sp>
+      <p:sp>
+        <p:nvSpPr>
+          <p:cNvPr id="4" name="Slide Number Placeholder 3"/>
+          <p:cNvSpPr>
+            <a:spLocks noGrp="1"/>
+          </p:cNvSpPr>
+          <p:nvPr>
+            <p:ph type="sldNum" idx="5" sz="quarter"/>
+          </p:nvPr>
+        </p:nvSpPr>
+        <p:spPr/>
+      </p:sp>
+    </p:spTree>
+  </p:cSld>
+  <p:clrMapOvr>
+    <a:masterClrMapping/>
+  </p:clrMapOvr>
+</p:notes>
+</file>
+
+<file path=ppt/notesSlides/notesSlide57.xml><?xml version="1.0" encoding="utf-8"?>
+<p:notes xmlns:a="http://schemas.openxmlformats.org/drawingml/2006/main" xmlns:p="http://schemas.openxmlformats.org/presentationml/2006/main" xmlns:r="http://schemas.openxmlformats.org/officeDocument/2006/relationships">
+  <p:cSld>
+    <p:spTree>
+      <p:nvGrpSpPr>
+        <p:cNvPr id="1" name=""/>
+        <p:cNvGrpSpPr/>
+        <p:nvPr/>
+      </p:nvGrpSpPr>
+      <p:grpSpPr>
+        <a:xfrm>
+          <a:off x="0" y="0"/>
+          <a:ext cx="0" cy="0"/>
+          <a:chOff x="0" y="0"/>
+          <a:chExt cx="0" cy="0"/>
+        </a:xfrm>
+      </p:grpSpPr>
+      <p:sp>
+        <p:nvSpPr>
+          <p:cNvPr id="2" name="Slide Image Placeholder 1"/>
+          <p:cNvSpPr>
+            <a:spLocks noGrp="1"/>
+          </p:cNvSpPr>
+          <p:nvPr>
+            <p:ph type="sldImg" idx="2"/>
+          </p:nvPr>
+        </p:nvSpPr>
+        <p:spPr/>
+      </p:sp>
+      <p:sp>
+        <p:nvSpPr>
+          <p:cNvPr id="3" name="Notes Placeholder 2"/>
+          <p:cNvSpPr>
+            <a:spLocks noGrp="1"/>
+          </p:cNvSpPr>
+          <p:nvPr>
+            <p:ph type="body" idx="3" sz="quarter"/>
+          </p:nvPr>
+        </p:nvSpPr>
+        <p:spPr/>
+        <p:txBody>
+          <a:bodyPr/>
+          <a:lstStyle/>
+          <a:p>
+            <a:r>
+              <a:t>module3/examples/factory/README.md</a:t>
+            </a:r>
+          </a:p>
+        </p:txBody>
+      </p:sp>
+      <p:sp>
+        <p:nvSpPr>
+          <p:cNvPr id="4" name="Slide Number Placeholder 3"/>
+          <p:cNvSpPr>
+            <a:spLocks noGrp="1"/>
+          </p:cNvSpPr>
+          <p:nvPr>
+            <p:ph type="sldNum" idx="5" sz="quarter"/>
+          </p:nvPr>
+        </p:nvSpPr>
+        <p:spPr/>
+      </p:sp>
+    </p:spTree>
+  </p:cSld>
+  <p:clrMapOvr>
+    <a:masterClrMapping/>
+  </p:clrMapOvr>
+</p:notes>
+</file>
+
+<file path=ppt/notesSlides/notesSlide58.xml><?xml version="1.0" encoding="utf-8"?>
+<p:notes xmlns:a="http://schemas.openxmlformats.org/drawingml/2006/main" xmlns:p="http://schemas.openxmlformats.org/presentationml/2006/main" xmlns:r="http://schemas.openxmlformats.org/officeDocument/2006/relationships">
+  <p:cSld>
+    <p:spTree>
+      <p:nvGrpSpPr>
+        <p:cNvPr id="1" name=""/>
+        <p:cNvGrpSpPr/>
+        <p:nvPr/>
+      </p:nvGrpSpPr>
+      <p:grpSpPr>
+        <a:xfrm>
+          <a:off x="0" y="0"/>
+          <a:ext cx="0" cy="0"/>
+          <a:chOff x="0" y="0"/>
+          <a:chExt cx="0" cy="0"/>
+        </a:xfrm>
+      </p:grpSpPr>
+      <p:sp>
+        <p:nvSpPr>
+          <p:cNvPr id="2" name="Slide Image Placeholder 1"/>
+          <p:cNvSpPr>
+            <a:spLocks noGrp="1"/>
+          </p:cNvSpPr>
+          <p:nvPr>
+            <p:ph type="sldImg" idx="2"/>
+          </p:nvPr>
+        </p:nvSpPr>
+        <p:spPr/>
+      </p:sp>
+      <p:sp>
+        <p:nvSpPr>
+          <p:cNvPr id="3" name="Notes Placeholder 2"/>
+          <p:cNvSpPr>
+            <a:spLocks noGrp="1"/>
+          </p:cNvSpPr>
+          <p:nvPr>
+            <p:ph type="body" idx="3" sz="quarter"/>
+          </p:nvPr>
+        </p:nvSpPr>
+        <p:spPr/>
+        <p:txBody>
+          <a:bodyPr/>
+          <a:lstStyle/>
+          <a:p>
+            <a:r>
+              <a:t>Hands-on: module3/examples/factory/</a:t>
+            </a:r>
+          </a:p>
+        </p:txBody>
+      </p:sp>
+      <p:sp>
+        <p:nvSpPr>
+          <p:cNvPr id="4" name="Slide Number Placeholder 3"/>
+          <p:cNvSpPr>
+            <a:spLocks noGrp="1"/>
+          </p:cNvSpPr>
+          <p:nvPr>
+            <p:ph type="sldNum" idx="5" sz="quarter"/>
+          </p:nvPr>
+        </p:nvSpPr>
+        <p:spPr/>
+      </p:sp>
+    </p:spTree>
+  </p:cSld>
+  <p:clrMapOvr>
+    <a:masterClrMapping/>
+  </p:clrMapOvr>
+</p:notes>
+</file>
+
+<file path=ppt/notesSlides/notesSlide59.xml><?xml version="1.0" encoding="utf-8"?>
+<p:notes xmlns:a="http://schemas.openxmlformats.org/drawingml/2006/main" xmlns:p="http://schemas.openxmlformats.org/presentationml/2006/main" xmlns:r="http://schemas.openxmlformats.org/officeDocument/2006/relationships">
+  <p:cSld>
+    <p:spTree>
+      <p:nvGrpSpPr>
+        <p:cNvPr id="1" name=""/>
+        <p:cNvGrpSpPr/>
+        <p:nvPr/>
+      </p:nvGrpSpPr>
+      <p:grpSpPr>
+        <a:xfrm>
+          <a:off x="0" y="0"/>
+          <a:ext cx="0" cy="0"/>
+          <a:chOff x="0" y="0"/>
+          <a:chExt cx="0" cy="0"/>
+        </a:xfrm>
+      </p:grpSpPr>
+      <p:sp>
+        <p:nvSpPr>
+          <p:cNvPr id="2" name="Slide Image Placeholder 1"/>
+          <p:cNvSpPr>
+            <a:spLocks noGrp="1"/>
+          </p:cNvSpPr>
+          <p:nvPr>
+            <p:ph type="sldImg" idx="2"/>
+          </p:nvPr>
+        </p:nvSpPr>
+        <p:spPr/>
+      </p:sp>
+      <p:sp>
+        <p:nvSpPr>
+          <p:cNvPr id="3" name="Notes Placeholder 2"/>
+          <p:cNvSpPr>
+            <a:spLocks noGrp="1"/>
+          </p:cNvSpPr>
+          <p:nvPr>
+            <p:ph type="body" idx="3" sz="quarter"/>
+          </p:nvPr>
+        </p:nvSpPr>
+        <p:spPr/>
+        <p:txBody>
+          <a:bodyPr/>
+          <a:lstStyle/>
+          <a:p>
+            <a:r>
+              <a:t>module3/examples/objections/README.md</a:t>
             </a:r>
           </a:p>
         </p:txBody>
@@ -3643,6 +4427,216 @@
           <a:p>
             <a:r>
               <a:t>From MODULE3 Topics Covered.</a:t>
+            </a:r>
+          </a:p>
+        </p:txBody>
+      </p:sp>
+      <p:sp>
+        <p:nvSpPr>
+          <p:cNvPr id="4" name="Slide Number Placeholder 3"/>
+          <p:cNvSpPr>
+            <a:spLocks noGrp="1"/>
+          </p:cNvSpPr>
+          <p:nvPr>
+            <p:ph type="sldNum" idx="5" sz="quarter"/>
+          </p:nvPr>
+        </p:nvSpPr>
+        <p:spPr/>
+      </p:sp>
+    </p:spTree>
+  </p:cSld>
+  <p:clrMapOvr>
+    <a:masterClrMapping/>
+  </p:clrMapOvr>
+</p:notes>
+</file>
+
+<file path=ppt/notesSlides/notesSlide60.xml><?xml version="1.0" encoding="utf-8"?>
+<p:notes xmlns:a="http://schemas.openxmlformats.org/drawingml/2006/main" xmlns:p="http://schemas.openxmlformats.org/presentationml/2006/main" xmlns:r="http://schemas.openxmlformats.org/officeDocument/2006/relationships">
+  <p:cSld>
+    <p:spTree>
+      <p:nvGrpSpPr>
+        <p:cNvPr id="1" name=""/>
+        <p:cNvGrpSpPr/>
+        <p:nvPr/>
+      </p:nvGrpSpPr>
+      <p:grpSpPr>
+        <a:xfrm>
+          <a:off x="0" y="0"/>
+          <a:ext cx="0" cy="0"/>
+          <a:chOff x="0" y="0"/>
+          <a:chExt cx="0" cy="0"/>
+        </a:xfrm>
+      </p:grpSpPr>
+      <p:sp>
+        <p:nvSpPr>
+          <p:cNvPr id="2" name="Slide Image Placeholder 1"/>
+          <p:cNvSpPr>
+            <a:spLocks noGrp="1"/>
+          </p:cNvSpPr>
+          <p:nvPr>
+            <p:ph type="sldImg" idx="2"/>
+          </p:nvPr>
+        </p:nvSpPr>
+        <p:spPr/>
+      </p:sp>
+      <p:sp>
+        <p:nvSpPr>
+          <p:cNvPr id="3" name="Notes Placeholder 2"/>
+          <p:cNvSpPr>
+            <a:spLocks noGrp="1"/>
+          </p:cNvSpPr>
+          <p:nvPr>
+            <p:ph type="body" idx="3" sz="quarter"/>
+          </p:nvPr>
+        </p:nvSpPr>
+        <p:spPr/>
+        <p:txBody>
+          <a:bodyPr/>
+          <a:lstStyle/>
+          <a:p>
+            <a:r>
+              <a:t>Hands-on: module3/examples/objections/</a:t>
+            </a:r>
+          </a:p>
+        </p:txBody>
+      </p:sp>
+      <p:sp>
+        <p:nvSpPr>
+          <p:cNvPr id="4" name="Slide Number Placeholder 3"/>
+          <p:cNvSpPr>
+            <a:spLocks noGrp="1"/>
+          </p:cNvSpPr>
+          <p:nvPr>
+            <p:ph type="sldNum" idx="5" sz="quarter"/>
+          </p:nvPr>
+        </p:nvSpPr>
+        <p:spPr/>
+      </p:sp>
+    </p:spTree>
+  </p:cSld>
+  <p:clrMapOvr>
+    <a:masterClrMapping/>
+  </p:clrMapOvr>
+</p:notes>
+</file>
+
+<file path=ppt/notesSlides/notesSlide61.xml><?xml version="1.0" encoding="utf-8"?>
+<p:notes xmlns:a="http://schemas.openxmlformats.org/drawingml/2006/main" xmlns:p="http://schemas.openxmlformats.org/presentationml/2006/main" xmlns:r="http://schemas.openxmlformats.org/officeDocument/2006/relationships">
+  <p:cSld>
+    <p:spTree>
+      <p:nvGrpSpPr>
+        <p:cNvPr id="1" name=""/>
+        <p:cNvGrpSpPr/>
+        <p:nvPr/>
+      </p:nvGrpSpPr>
+      <p:grpSpPr>
+        <a:xfrm>
+          <a:off x="0" y="0"/>
+          <a:ext cx="0" cy="0"/>
+          <a:chOff x="0" y="0"/>
+          <a:chExt cx="0" cy="0"/>
+        </a:xfrm>
+      </p:grpSpPr>
+      <p:sp>
+        <p:nvSpPr>
+          <p:cNvPr id="2" name="Slide Image Placeholder 1"/>
+          <p:cNvSpPr>
+            <a:spLocks noGrp="1"/>
+          </p:cNvSpPr>
+          <p:nvPr>
+            <p:ph type="sldImg" idx="2"/>
+          </p:nvPr>
+        </p:nvSpPr>
+        <p:spPr/>
+      </p:sp>
+      <p:sp>
+        <p:nvSpPr>
+          <p:cNvPr id="3" name="Notes Placeholder 2"/>
+          <p:cNvSpPr>
+            <a:spLocks noGrp="1"/>
+          </p:cNvSpPr>
+          <p:nvPr>
+            <p:ph type="body" idx="3" sz="quarter"/>
+          </p:nvPr>
+        </p:nvSpPr>
+        <p:spPr/>
+        <p:txBody>
+          <a:bodyPr/>
+          <a:lstStyle/>
+          <a:p>
+            <a:r>
+              <a:t>From MODULE3 Learning Outcomes.</a:t>
+            </a:r>
+          </a:p>
+        </p:txBody>
+      </p:sp>
+      <p:sp>
+        <p:nvSpPr>
+          <p:cNvPr id="4" name="Slide Number Placeholder 3"/>
+          <p:cNvSpPr>
+            <a:spLocks noGrp="1"/>
+          </p:cNvSpPr>
+          <p:nvPr>
+            <p:ph type="sldNum" idx="5" sz="quarter"/>
+          </p:nvPr>
+        </p:nvSpPr>
+        <p:spPr/>
+      </p:sp>
+    </p:spTree>
+  </p:cSld>
+  <p:clrMapOvr>
+    <a:masterClrMapping/>
+  </p:clrMapOvr>
+</p:notes>
+</file>
+
+<file path=ppt/notesSlides/notesSlide62.xml><?xml version="1.0" encoding="utf-8"?>
+<p:notes xmlns:a="http://schemas.openxmlformats.org/drawingml/2006/main" xmlns:p="http://schemas.openxmlformats.org/presentationml/2006/main" xmlns:r="http://schemas.openxmlformats.org/officeDocument/2006/relationships">
+  <p:cSld>
+    <p:spTree>
+      <p:nvGrpSpPr>
+        <p:cNvPr id="1" name=""/>
+        <p:cNvGrpSpPr/>
+        <p:nvPr/>
+      </p:nvGrpSpPr>
+      <p:grpSpPr>
+        <a:xfrm>
+          <a:off x="0" y="0"/>
+          <a:ext cx="0" cy="0"/>
+          <a:chOff x="0" y="0"/>
+          <a:chExt cx="0" cy="0"/>
+        </a:xfrm>
+      </p:grpSpPr>
+      <p:sp>
+        <p:nvSpPr>
+          <p:cNvPr id="2" name="Slide Image Placeholder 1"/>
+          <p:cNvSpPr>
+            <a:spLocks noGrp="1"/>
+          </p:cNvSpPr>
+          <p:nvPr>
+            <p:ph type="sldImg" idx="2"/>
+          </p:nvPr>
+        </p:nvSpPr>
+        <p:spPr/>
+      </p:sp>
+      <p:sp>
+        <p:nvSpPr>
+          <p:cNvPr id="3" name="Notes Placeholder 2"/>
+          <p:cNvSpPr>
+            <a:spLocks noGrp="1"/>
+          </p:cNvSpPr>
+          <p:nvPr>
+            <p:ph type="body" idx="3" sz="quarter"/>
+          </p:nvPr>
+        </p:nvSpPr>
+        <p:spPr/>
+        <p:txBody>
+          <a:bodyPr/>
+          <a:lstStyle/>
+          <a:p>
+            <a:r>
+              <a:t>From MODULE3 Learning Outcomes.</a:t>
             </a:r>
           </a:p>
         </p:txBody>
@@ -18925,7 +19919,7 @@
               </a:defRPr>
             </a:pPr>
             <a:r>
-              <a:t>$ ./scripts/module3.sh --check</a:t>
+              <a:t>$ ./scripts/module3.sh --class-hierarchy</a:t>
             </a:r>
           </a:p>
         </p:txBody>
@@ -19159,8 +20153,8 @@
         </p:nvSpPr>
         <p:spPr>
           <a:xfrm>
-            <a:off x="548640" y="2743200"/>
-            <a:ext cx="11064240" cy="1371600"/>
+            <a:off x="548640" y="411480"/>
+            <a:ext cx="11064240" cy="777240"/>
           </a:xfrm>
           <a:prstGeom prst="rect">
             <a:avLst/>
@@ -19173,11 +20167,11 @@
           </a:bodyPr>
           <a:lstStyle/>
           <a:p>
-            <a:pPr algn="ctr">
-              <a:lnSpc>
-                <a:spcPts val="2200"/>
-              </a:lnSpc>
-              <a:defRPr sz="3600" b="1">
+            <a:pPr>
+              <a:lnSpc>
+                <a:spcPts val="2200"/>
+              </a:lnSpc>
+              <a:defRPr sz="2800" b="1">
                 <a:solidFill>
                   <a:srgbClr val="1A1A2E"/>
                 </a:solidFill>
@@ -19185,7 +20179,7 @@
               </a:defRPr>
             </a:pPr>
             <a:r>
-              <a:t>Practice &amp; assessment</a:t>
+              <a:t>Example 1: Class Hierarchy</a:t>
             </a:r>
           </a:p>
         </p:txBody>
@@ -19193,6 +20187,143 @@
       <p:sp>
         <p:nvSpPr>
           <p:cNvPr id="3" name="TextBox 2"/>
+          <p:cNvSpPr txBox="1"/>
+          <p:nvPr/>
+        </p:nvSpPr>
+        <p:spPr>
+          <a:xfrm>
+            <a:off x="548640" y="1234440"/>
+            <a:ext cx="11064240" cy="4937760"/>
+          </a:xfrm>
+          <a:prstGeom prst="rect">
+            <a:avLst/>
+          </a:prstGeom>
+          <a:noFill/>
+        </p:spPr>
+        <p:txBody>
+          <a:bodyPr wrap="square">
+            <a:noAutofit/>
+          </a:bodyPr>
+          <a:lstStyle/>
+          <a:p>
+            <a:pPr>
+              <a:lnSpc>
+                <a:spcPts val="2200"/>
+              </a:lnSpc>
+              <a:spcAft>
+                <a:spcPts val="1000"/>
+              </a:spcAft>
+              <a:defRPr sz="2000" b="0">
+                <a:solidFill>
+                  <a:srgbClr val="333333"/>
+                </a:solidFill>
+                <a:latin typeface="Calibri"/>
+              </a:defRPr>
+            </a:pPr>
+            <a:r>
+              <a:t>• Transaction Class (`MyTransaction`): Extends</a:t>
+            </a:r>
+          </a:p>
+          <a:p>
+            <a:pPr>
+              <a:lnSpc>
+                <a:spcPts val="2200"/>
+              </a:lnSpc>
+              <a:spcAft>
+                <a:spcPts val="1000"/>
+              </a:spcAft>
+              <a:defRPr sz="2000" b="0">
+                <a:solidFill>
+                  <a:srgbClr val="333333"/>
+                </a:solidFill>
+                <a:latin typeface="Calibri"/>
+              </a:defRPr>
+            </a:pPr>
+            <a:r>
+              <a:t>      `uvm_sequence_item` (uvm_object hierarchy)</a:t>
+            </a:r>
+          </a:p>
+          <a:p>
+            <a:pPr>
+              <a:lnSpc>
+                <a:spcPts val="2200"/>
+              </a:lnSpc>
+              <a:spcAft>
+                <a:spcPts val="1000"/>
+              </a:spcAft>
+              <a:defRPr sz="2000" b="0">
+                <a:solidFill>
+                  <a:srgbClr val="333333"/>
+                </a:solidFill>
+                <a:latin typeface="Calibri"/>
+              </a:defRPr>
+            </a:pPr>
+            <a:r>
+              <a:t>• Driver Class (`MyDriver`): Extends `uvm_driver`</a:t>
+            </a:r>
+          </a:p>
+          <a:p>
+            <a:pPr>
+              <a:lnSpc>
+                <a:spcPts val="2200"/>
+              </a:lnSpc>
+              <a:spcAft>
+                <a:spcPts val="1000"/>
+              </a:spcAft>
+              <a:defRPr sz="2000" b="0">
+                <a:solidFill>
+                  <a:srgbClr val="333333"/>
+                </a:solidFill>
+                <a:latin typeface="Calibri"/>
+              </a:defRPr>
+            </a:pPr>
+            <a:r>
+              <a:t>      (uvm_component hierarchy)</a:t>
+            </a:r>
+          </a:p>
+          <a:p>
+            <a:pPr>
+              <a:lnSpc>
+                <a:spcPts val="2200"/>
+              </a:lnSpc>
+              <a:spcAft>
+                <a:spcPts val="1000"/>
+              </a:spcAft>
+              <a:defRPr sz="2000" b="0">
+                <a:solidFill>
+                  <a:srgbClr val="333333"/>
+                </a:solidFill>
+                <a:latin typeface="Calibri"/>
+              </a:defRPr>
+            </a:pPr>
+            <a:r>
+              <a:t>• Monitor Class (`MyMonitor`): Extends `uvm_monitor`</a:t>
+            </a:r>
+          </a:p>
+          <a:p>
+            <a:pPr>
+              <a:lnSpc>
+                <a:spcPts val="2200"/>
+              </a:lnSpc>
+              <a:spcAft>
+                <a:spcPts val="1000"/>
+              </a:spcAft>
+              <a:defRPr sz="2000" b="0">
+                <a:solidFill>
+                  <a:srgbClr val="333333"/>
+                </a:solidFill>
+                <a:latin typeface="Calibri"/>
+              </a:defRPr>
+            </a:pPr>
+            <a:r>
+              <a:t>      (uvm_component hierarchy)</a:t>
+            </a:r>
+          </a:p>
+        </p:txBody>
+      </p:sp>
+      <p:sp>
+        <p:nvSpPr>
+          <p:cNvPr id="4" name="TextBox 3"/>
           <p:cNvSpPr txBox="1"/>
           <p:nvPr/>
         </p:nvSpPr>
@@ -19281,7 +20412,7 @@
               </a:defRPr>
             </a:pPr>
             <a:r>
-              <a:t>Exercises</a:t>
+              <a:t>Demo: Class Hierarchy</a:t>
             </a:r>
           </a:p>
         </p:txBody>
@@ -19294,13 +20425,15 @@
         </p:nvSpPr>
         <p:spPr>
           <a:xfrm>
-            <a:off x="548640" y="1234440"/>
-            <a:ext cx="11064240" cy="4937760"/>
+            <a:off x="548640" y="1051560"/>
+            <a:ext cx="11064240" cy="914400"/>
           </a:xfrm>
           <a:prstGeom prst="rect">
             <a:avLst/>
           </a:prstGeom>
-          <a:noFill/>
+          <a:solidFill>
+            <a:srgbClr val="F4F4F4"/>
+          </a:solidFill>
         </p:spPr>
         <p:txBody>
           <a:bodyPr wrap="square">
@@ -19313,100 +20446,48 @@
                 <a:spcPts val="2200"/>
               </a:lnSpc>
               <a:spcAft>
-                <a:spcPts val="1000"/>
-              </a:spcAft>
-              <a:defRPr sz="2000" b="0">
-                <a:solidFill>
-                  <a:srgbClr val="333333"/>
-                </a:solidFill>
-                <a:latin typeface="Calibri"/>
-              </a:defRPr>
-            </a:pPr>
-            <a:r>
-              <a:t>• Class Hierarchy</a:t>
-            </a:r>
-          </a:p>
-          <a:p>
-            <a:pPr>
-              <a:lnSpc>
-                <a:spcPts val="2200"/>
-              </a:lnSpc>
-              <a:spcAft>
-                <a:spcPts val="1000"/>
-              </a:spcAft>
-              <a:defRPr sz="2000" b="0">
-                <a:solidFill>
-                  <a:srgbClr val="333333"/>
-                </a:solidFill>
-                <a:latin typeface="Calibri"/>
-              </a:defRPr>
-            </a:pPr>
-            <a:r>
-              <a:t>• Phases</a:t>
-            </a:r>
-          </a:p>
-          <a:p>
-            <a:pPr>
-              <a:lnSpc>
-                <a:spcPts val="2200"/>
-              </a:lnSpc>
-              <a:spcAft>
-                <a:spcPts val="1000"/>
-              </a:spcAft>
-              <a:defRPr sz="2000" b="0">
-                <a:solidFill>
-                  <a:srgbClr val="333333"/>
-                </a:solidFill>
-                <a:latin typeface="Calibri"/>
-              </a:defRPr>
-            </a:pPr>
-            <a:r>
-              <a:t>• Reporting</a:t>
-            </a:r>
-          </a:p>
-          <a:p>
-            <a:pPr>
-              <a:lnSpc>
-                <a:spcPts val="2200"/>
-              </a:lnSpc>
-              <a:spcAft>
-                <a:spcPts val="1000"/>
-              </a:spcAft>
-              <a:defRPr sz="2000" b="0">
-                <a:solidFill>
-                  <a:srgbClr val="333333"/>
-                </a:solidFill>
-                <a:latin typeface="Calibri"/>
-              </a:defRPr>
-            </a:pPr>
-            <a:r>
-              <a:t>• ConfigDB</a:t>
-            </a:r>
-          </a:p>
-          <a:p>
-            <a:pPr>
-              <a:lnSpc>
-                <a:spcPts val="2200"/>
-              </a:lnSpc>
-              <a:spcAft>
-                <a:spcPts val="1000"/>
-              </a:spcAft>
-              <a:defRPr sz="2000" b="0">
-                <a:solidFill>
-                  <a:srgbClr val="333333"/>
-                </a:solidFill>
-                <a:latin typeface="Calibri"/>
-              </a:defRPr>
-            </a:pPr>
-            <a:r>
-              <a:t>• Factory</a:t>
-            </a:r>
-          </a:p>
-        </p:txBody>
-      </p:sp>
-      <p:sp>
-        <p:nvSpPr>
-          <p:cNvPr id="4" name="TextBox 3"/>
+                <a:spcPts val="200"/>
+              </a:spcAft>
+              <a:defRPr sz="2000" b="0">
+                <a:solidFill>
+                  <a:srgbClr val="333333"/>
+                </a:solidFill>
+                <a:latin typeface="Consolas"/>
+              </a:defRPr>
+            </a:pPr>
+            <a:r>
+              <a:t>$ ./scripts/module3.sh --class-hierarchy</a:t>
+            </a:r>
+          </a:p>
+        </p:txBody>
+      </p:sp>
+      <p:pic>
+        <p:nvPicPr>
+          <p:cNvPr id="4" name="Picture 3" descr="ex01_class_hierarchy.png"/>
+          <p:cNvPicPr>
+            <a:picLocks noChangeAspect="1"/>
+          </p:cNvPicPr>
+          <p:nvPr/>
+        </p:nvPicPr>
+        <p:blipFill>
+          <a:blip r:embed="rId2"/>
+          <a:stretch>
+            <a:fillRect/>
+          </a:stretch>
+        </p:blipFill>
+        <p:spPr>
+          <a:xfrm>
+            <a:off x="548640" y="1965960"/>
+            <a:ext cx="7071358" cy="3977639"/>
+          </a:xfrm>
+          <a:prstGeom prst="rect">
+            <a:avLst/>
+          </a:prstGeom>
+        </p:spPr>
+      </p:pic>
+      <p:sp>
+        <p:nvSpPr>
+          <p:cNvPr id="5" name="TextBox 4"/>
           <p:cNvSpPr txBox="1"/>
           <p:nvPr/>
         </p:nvSpPr>
@@ -19495,7 +20576,7 @@
               </a:defRPr>
             </a:pPr>
             <a:r>
-              <a:t>Exercises</a:t>
+              <a:t>Example 2: Phases</a:t>
             </a:r>
           </a:p>
         </p:txBody>
@@ -19537,7 +20618,102 @@
               </a:defRPr>
             </a:pPr>
             <a:r>
-              <a:t>• Objections</a:t>
+              <a:t>• Build-Time Phases: Top-down execution (parent before</a:t>
+            </a:r>
+          </a:p>
+          <a:p>
+            <a:pPr>
+              <a:lnSpc>
+                <a:spcPts val="2200"/>
+              </a:lnSpc>
+              <a:spcAft>
+                <a:spcPts val="1000"/>
+              </a:spcAft>
+              <a:defRPr sz="2000" b="0">
+                <a:solidFill>
+                  <a:srgbClr val="333333"/>
+                </a:solidFill>
+                <a:latin typeface="Calibri"/>
+              </a:defRPr>
+            </a:pPr>
+            <a:r>
+              <a:t>      child)</a:t>
+            </a:r>
+          </a:p>
+          <a:p>
+            <a:pPr>
+              <a:lnSpc>
+                <a:spcPts val="2200"/>
+              </a:lnSpc>
+              <a:spcAft>
+                <a:spcPts val="1000"/>
+              </a:spcAft>
+              <a:defRPr sz="2000" b="0">
+                <a:solidFill>
+                  <a:srgbClr val="333333"/>
+                </a:solidFill>
+                <a:latin typeface="Calibri"/>
+              </a:defRPr>
+            </a:pPr>
+            <a:r>
+              <a:t>• Run-Time Phases: Bottom-up execution (child before</a:t>
+            </a:r>
+          </a:p>
+          <a:p>
+            <a:pPr>
+              <a:lnSpc>
+                <a:spcPts val="2200"/>
+              </a:lnSpc>
+              <a:spcAft>
+                <a:spcPts val="1000"/>
+              </a:spcAft>
+              <a:defRPr sz="2000" b="0">
+                <a:solidFill>
+                  <a:srgbClr val="333333"/>
+                </a:solidFill>
+                <a:latin typeface="Calibri"/>
+              </a:defRPr>
+            </a:pPr>
+            <a:r>
+              <a:t>      parent)</a:t>
+            </a:r>
+          </a:p>
+          <a:p>
+            <a:pPr>
+              <a:lnSpc>
+                <a:spcPts val="2200"/>
+              </a:lnSpc>
+              <a:spcAft>
+                <a:spcPts val="1000"/>
+              </a:spcAft>
+              <a:defRPr sz="2000" b="0">
+                <a:solidFill>
+                  <a:srgbClr val="333333"/>
+                </a:solidFill>
+                <a:latin typeface="Calibri"/>
+              </a:defRPr>
+            </a:pPr>
+            <a:r>
+              <a:t>• Cleanup Phases: Bottom-up execution (child before</a:t>
+            </a:r>
+          </a:p>
+          <a:p>
+            <a:pPr>
+              <a:lnSpc>
+                <a:spcPts val="2200"/>
+              </a:lnSpc>
+              <a:spcAft>
+                <a:spcPts val="1000"/>
+              </a:spcAft>
+              <a:defRPr sz="2000" b="0">
+                <a:solidFill>
+                  <a:srgbClr val="333333"/>
+                </a:solidFill>
+                <a:latin typeface="Calibri"/>
+              </a:defRPr>
+            </a:pPr>
+            <a:r>
+              <a:t>      parent)</a:t>
             </a:r>
           </a:p>
         </p:txBody>
@@ -19729,7 +20905,7 @@
               </a:defRPr>
             </a:pPr>
             <a:r>
-              <a:t>Assessment checklist</a:t>
+              <a:t>Demo: Phases</a:t>
             </a:r>
           </a:p>
         </p:txBody>
@@ -19742,13 +20918,15 @@
         </p:nvSpPr>
         <p:spPr>
           <a:xfrm>
-            <a:off x="548640" y="1234440"/>
-            <a:ext cx="11064240" cy="4937760"/>
+            <a:off x="548640" y="1051560"/>
+            <a:ext cx="11064240" cy="914400"/>
           </a:xfrm>
           <a:prstGeom prst="rect">
             <a:avLst/>
           </a:prstGeom>
-          <a:noFill/>
+          <a:solidFill>
+            <a:srgbClr val="F4F4F4"/>
+          </a:solidFill>
         </p:spPr>
         <p:txBody>
           <a:bodyPr wrap="square">
@@ -19761,119 +20939,48 @@
                 <a:spcPts val="2200"/>
               </a:lnSpc>
               <a:spcAft>
-                <a:spcPts val="1000"/>
-              </a:spcAft>
-              <a:defRPr sz="2000" b="0">
-                <a:solidFill>
-                  <a:srgbClr val="333333"/>
-                </a:solidFill>
-                <a:latin typeface="Calibri"/>
-              </a:defRPr>
-            </a:pPr>
-            <a:r>
-              <a:t>• Understands UVM class hierarchy</a:t>
-            </a:r>
-          </a:p>
-          <a:p>
-            <a:pPr>
-              <a:lnSpc>
-                <a:spcPts val="2200"/>
-              </a:lnSpc>
-              <a:spcAft>
-                <a:spcPts val="1000"/>
-              </a:spcAft>
-              <a:defRPr sz="2000" b="0">
-                <a:solidFill>
-                  <a:srgbClr val="333333"/>
-                </a:solidFill>
-                <a:latin typeface="Calibri"/>
-              </a:defRPr>
-            </a:pPr>
-            <a:r>
-              <a:t>• Masters UVM phases</a:t>
-            </a:r>
-          </a:p>
-          <a:p>
-            <a:pPr>
-              <a:lnSpc>
-                <a:spcPts val="2200"/>
-              </a:lnSpc>
-              <a:spcAft>
-                <a:spcPts val="1000"/>
-              </a:spcAft>
-              <a:defRPr sz="2000" b="0">
-                <a:solidFill>
-                  <a:srgbClr val="333333"/>
-                </a:solidFill>
-                <a:latin typeface="Calibri"/>
-              </a:defRPr>
-            </a:pPr>
-            <a:r>
-              <a:t>• Uses UVM reporting effectively</a:t>
-            </a:r>
-          </a:p>
-          <a:p>
-            <a:pPr>
-              <a:lnSpc>
-                <a:spcPts val="2200"/>
-              </a:lnSpc>
-              <a:spcAft>
-                <a:spcPts val="1000"/>
-              </a:spcAft>
-              <a:defRPr sz="2000" b="0">
-                <a:solidFill>
-                  <a:srgbClr val="333333"/>
-                </a:solidFill>
-                <a:latin typeface="Calibri"/>
-              </a:defRPr>
-            </a:pPr>
-            <a:r>
-              <a:t>• Configures components using ConfigDB</a:t>
-            </a:r>
-          </a:p>
-          <a:p>
-            <a:pPr>
-              <a:lnSpc>
-                <a:spcPts val="2200"/>
-              </a:lnSpc>
-              <a:spcAft>
-                <a:spcPts val="1000"/>
-              </a:spcAft>
-              <a:defRPr sz="2000" b="0">
-                <a:solidFill>
-                  <a:srgbClr val="333333"/>
-                </a:solidFill>
-                <a:latin typeface="Calibri"/>
-              </a:defRPr>
-            </a:pPr>
-            <a:r>
-              <a:t>• Understands factory pattern</a:t>
-            </a:r>
-          </a:p>
-          <a:p>
-            <a:pPr>
-              <a:lnSpc>
-                <a:spcPts val="2200"/>
-              </a:lnSpc>
-              <a:spcAft>
-                <a:spcPts val="1000"/>
-              </a:spcAft>
-              <a:defRPr sz="2000" b="0">
-                <a:solidFill>
-                  <a:srgbClr val="333333"/>
-                </a:solidFill>
-                <a:latin typeface="Calibri"/>
-              </a:defRPr>
-            </a:pPr>
-            <a:r>
-              <a:t>• Controls simulation with objections</a:t>
-            </a:r>
-          </a:p>
-        </p:txBody>
-      </p:sp>
-      <p:sp>
-        <p:nvSpPr>
-          <p:cNvPr id="4" name="TextBox 3"/>
+                <a:spcPts val="200"/>
+              </a:spcAft>
+              <a:defRPr sz="2000" b="0">
+                <a:solidFill>
+                  <a:srgbClr val="333333"/>
+                </a:solidFill>
+                <a:latin typeface="Consolas"/>
+              </a:defRPr>
+            </a:pPr>
+            <a:r>
+              <a:t>$ ./scripts/module3.sh --phases</a:t>
+            </a:r>
+          </a:p>
+        </p:txBody>
+      </p:sp>
+      <p:pic>
+        <p:nvPicPr>
+          <p:cNvPr id="4" name="Picture 3" descr="ex02_phases.png"/>
+          <p:cNvPicPr>
+            <a:picLocks noChangeAspect="1"/>
+          </p:cNvPicPr>
+          <p:nvPr/>
+        </p:nvPicPr>
+        <p:blipFill>
+          <a:blip r:embed="rId2"/>
+          <a:stretch>
+            <a:fillRect/>
+          </a:stretch>
+        </p:blipFill>
+        <p:spPr>
+          <a:xfrm>
+            <a:off x="548640" y="1965960"/>
+            <a:ext cx="7071358" cy="3977639"/>
+          </a:xfrm>
+          <a:prstGeom prst="rect">
+            <a:avLst/>
+          </a:prstGeom>
+        </p:spPr>
+      </p:pic>
+      <p:sp>
+        <p:nvSpPr>
+          <p:cNvPr id="5" name="TextBox 4"/>
           <p:cNvSpPr txBox="1"/>
           <p:nvPr/>
         </p:nvSpPr>
@@ -19962,7 +21069,7 @@
               </a:defRPr>
             </a:pPr>
             <a:r>
-              <a:t>Summary &amp; next steps</a:t>
+              <a:t>Example 3: Reporting</a:t>
             </a:r>
           </a:p>
         </p:txBody>
@@ -20004,64 +21111,83 @@
               </a:defRPr>
             </a:pPr>
             <a:r>
-              <a:t>• Master UVM class hierarchy and phases</a:t>
-            </a:r>
-          </a:p>
-          <a:p>
-            <a:pPr>
-              <a:lnSpc>
-                <a:spcPts val="2200"/>
-              </a:lnSpc>
-              <a:spcAft>
-                <a:spcPts val="1000"/>
-              </a:spcAft>
-              <a:defRPr sz="2000" b="0">
-                <a:solidFill>
-                  <a:srgbClr val="333333"/>
-                </a:solidFill>
-                <a:latin typeface="Calibri"/>
-              </a:defRPr>
-            </a:pPr>
-            <a:r>
-              <a:t>• Complete module3/CHECKLIST.md</a:t>
-            </a:r>
-          </a:p>
-          <a:p>
-            <a:pPr>
-              <a:lnSpc>
-                <a:spcPts val="2200"/>
-              </a:lnSpc>
-              <a:spcAft>
-                <a:spcPts val="1000"/>
-              </a:spcAft>
-              <a:defRPr sz="2000" b="0">
-                <a:solidFill>
-                  <a:srgbClr val="333333"/>
-                </a:solidFill>
-                <a:latin typeface="Calibri"/>
-              </a:defRPr>
-            </a:pPr>
-            <a:r>
-              <a:t>• Run ./scripts/module3.sh --check</a:t>
-            </a:r>
-          </a:p>
-          <a:p>
-            <a:pPr>
-              <a:lnSpc>
-                <a:spcPts val="2200"/>
-              </a:lnSpc>
-              <a:spcAft>
-                <a:spcPts val="1000"/>
-              </a:spcAft>
-              <a:defRPr sz="2000" b="0">
-                <a:solidFill>
-                  <a:srgbClr val="333333"/>
-                </a:solidFill>
-                <a:latin typeface="Calibri"/>
-              </a:defRPr>
-            </a:pPr>
-            <a:r>
-              <a:t>• Next: Next module in course</a:t>
+              <a:t>• Severity Levels: INFO, WARNING, ERROR, FATAL</a:t>
+            </a:r>
+          </a:p>
+          <a:p>
+            <a:pPr>
+              <a:lnSpc>
+                <a:spcPts val="2200"/>
+              </a:lnSpc>
+              <a:spcAft>
+                <a:spcPts val="1000"/>
+              </a:spcAft>
+              <a:defRPr sz="2000" b="0">
+                <a:solidFill>
+                  <a:srgbClr val="333333"/>
+                </a:solidFill>
+                <a:latin typeface="Calibri"/>
+              </a:defRPr>
+            </a:pPr>
+            <a:r>
+              <a:t>• Verbosity Levels: UVM_LOW, UVM_MEDIUM, UVM_HIGH,</a:t>
+            </a:r>
+          </a:p>
+          <a:p>
+            <a:pPr>
+              <a:lnSpc>
+                <a:spcPts val="2200"/>
+              </a:lnSpc>
+              <a:spcAft>
+                <a:spcPts val="1000"/>
+              </a:spcAft>
+              <a:defRPr sz="2000" b="0">
+                <a:solidFill>
+                  <a:srgbClr val="333333"/>
+                </a:solidFill>
+                <a:latin typeface="Calibri"/>
+              </a:defRPr>
+            </a:pPr>
+            <a:r>
+              <a:t>      UVM_FULL, UVM_DEBUG</a:t>
+            </a:r>
+          </a:p>
+          <a:p>
+            <a:pPr>
+              <a:lnSpc>
+                <a:spcPts val="2200"/>
+              </a:lnSpc>
+              <a:spcAft>
+                <a:spcPts val="1000"/>
+              </a:spcAft>
+              <a:defRPr sz="2000" b="0">
+                <a:solidFill>
+                  <a:srgbClr val="333333"/>
+                </a:solidFill>
+                <a:latin typeface="Calibri"/>
+              </a:defRPr>
+            </a:pPr>
+            <a:r>
+              <a:t>• Message Formatting: Formatted messages with data</a:t>
+            </a:r>
+          </a:p>
+          <a:p>
+            <a:pPr>
+              <a:lnSpc>
+                <a:spcPts val="2200"/>
+              </a:lnSpc>
+              <a:spcAft>
+                <a:spcPts val="1000"/>
+              </a:spcAft>
+              <a:defRPr sz="2000" b="0">
+                <a:solidFill>
+                  <a:srgbClr val="333333"/>
+                </a:solidFill>
+                <a:latin typeface="Calibri"/>
+              </a:defRPr>
+            </a:pPr>
+            <a:r>
+              <a:t>      values</a:t>
             </a:r>
           </a:p>
         </p:txBody>
@@ -20069,6 +21195,1343 @@
       <p:sp>
         <p:nvSpPr>
           <p:cNvPr id="4" name="TextBox 3"/>
+          <p:cNvSpPr txBox="1"/>
+          <p:nvPr/>
+        </p:nvSpPr>
+        <p:spPr>
+          <a:xfrm>
+            <a:off x="548640" y="6355080"/>
+            <a:ext cx="11064240" cy="320040"/>
+          </a:xfrm>
+          <a:prstGeom prst="rect">
+            <a:avLst/>
+          </a:prstGeom>
+          <a:noFill/>
+        </p:spPr>
+        <p:txBody>
+          <a:bodyPr wrap="square">
+            <a:noAutofit/>
+          </a:bodyPr>
+          <a:lstStyle/>
+          <a:p>
+            <a:pPr algn="r">
+              <a:lnSpc>
+                <a:spcPts val="2200"/>
+              </a:lnSpc>
+              <a:defRPr sz="1000" b="0">
+                <a:solidFill>
+                  <a:srgbClr val="666666"/>
+                </a:solidFill>
+                <a:latin typeface="Calibri"/>
+              </a:defRPr>
+            </a:pPr>
+            <a:r>
+              <a:t>learn_uvm2017_sv_verilator / Module 3</a:t>
+            </a:r>
+          </a:p>
+        </p:txBody>
+      </p:sp>
+    </p:spTree>
+  </p:cSld>
+  <p:clrMapOvr>
+    <a:masterClrMapping/>
+  </p:clrMapOvr>
+</p:sld>
+</file>
+
+<file path=ppt/slides/slide62.xml><?xml version="1.0" encoding="utf-8"?>
+<p:sld xmlns:a="http://schemas.openxmlformats.org/drawingml/2006/main" xmlns:p="http://schemas.openxmlformats.org/presentationml/2006/main" xmlns:r="http://schemas.openxmlformats.org/officeDocument/2006/relationships">
+  <p:cSld>
+    <p:spTree>
+      <p:nvGrpSpPr>
+        <p:cNvPr id="1" name=""/>
+        <p:cNvGrpSpPr/>
+        <p:nvPr/>
+      </p:nvGrpSpPr>
+      <p:grpSpPr/>
+      <p:sp>
+        <p:nvSpPr>
+          <p:cNvPr id="2" name="TextBox 1"/>
+          <p:cNvSpPr txBox="1"/>
+          <p:nvPr/>
+        </p:nvSpPr>
+        <p:spPr>
+          <a:xfrm>
+            <a:off x="548640" y="411480"/>
+            <a:ext cx="11064240" cy="777240"/>
+          </a:xfrm>
+          <a:prstGeom prst="rect">
+            <a:avLst/>
+          </a:prstGeom>
+          <a:noFill/>
+        </p:spPr>
+        <p:txBody>
+          <a:bodyPr wrap="square">
+            <a:noAutofit/>
+          </a:bodyPr>
+          <a:lstStyle/>
+          <a:p>
+            <a:pPr>
+              <a:lnSpc>
+                <a:spcPts val="2200"/>
+              </a:lnSpc>
+              <a:defRPr sz="2800" b="1">
+                <a:solidFill>
+                  <a:srgbClr val="1A1A2E"/>
+                </a:solidFill>
+                <a:latin typeface="Calibri"/>
+              </a:defRPr>
+            </a:pPr>
+            <a:r>
+              <a:t>Demo: Reporting</a:t>
+            </a:r>
+          </a:p>
+        </p:txBody>
+      </p:sp>
+      <p:sp>
+        <p:nvSpPr>
+          <p:cNvPr id="3" name="TextBox 2"/>
+          <p:cNvSpPr txBox="1"/>
+          <p:nvPr/>
+        </p:nvSpPr>
+        <p:spPr>
+          <a:xfrm>
+            <a:off x="548640" y="1051560"/>
+            <a:ext cx="11064240" cy="914400"/>
+          </a:xfrm>
+          <a:prstGeom prst="rect">
+            <a:avLst/>
+          </a:prstGeom>
+          <a:solidFill>
+            <a:srgbClr val="F4F4F4"/>
+          </a:solidFill>
+        </p:spPr>
+        <p:txBody>
+          <a:bodyPr wrap="square">
+            <a:noAutofit/>
+          </a:bodyPr>
+          <a:lstStyle/>
+          <a:p>
+            <a:pPr>
+              <a:lnSpc>
+                <a:spcPts val="2200"/>
+              </a:lnSpc>
+              <a:spcAft>
+                <a:spcPts val="200"/>
+              </a:spcAft>
+              <a:defRPr sz="2000" b="0">
+                <a:solidFill>
+                  <a:srgbClr val="333333"/>
+                </a:solidFill>
+                <a:latin typeface="Consolas"/>
+              </a:defRPr>
+            </a:pPr>
+            <a:r>
+              <a:t>$ ./scripts/module3.sh --reporting</a:t>
+            </a:r>
+          </a:p>
+        </p:txBody>
+      </p:sp>
+      <p:pic>
+        <p:nvPicPr>
+          <p:cNvPr id="4" name="Picture 3" descr="ex03_reporting.png"/>
+          <p:cNvPicPr>
+            <a:picLocks noChangeAspect="1"/>
+          </p:cNvPicPr>
+          <p:nvPr/>
+        </p:nvPicPr>
+        <p:blipFill>
+          <a:blip r:embed="rId2"/>
+          <a:stretch>
+            <a:fillRect/>
+          </a:stretch>
+        </p:blipFill>
+        <p:spPr>
+          <a:xfrm>
+            <a:off x="548640" y="1965960"/>
+            <a:ext cx="7071358" cy="3977639"/>
+          </a:xfrm>
+          <a:prstGeom prst="rect">
+            <a:avLst/>
+          </a:prstGeom>
+        </p:spPr>
+      </p:pic>
+      <p:sp>
+        <p:nvSpPr>
+          <p:cNvPr id="5" name="TextBox 4"/>
+          <p:cNvSpPr txBox="1"/>
+          <p:nvPr/>
+        </p:nvSpPr>
+        <p:spPr>
+          <a:xfrm>
+            <a:off x="548640" y="6355080"/>
+            <a:ext cx="11064240" cy="320040"/>
+          </a:xfrm>
+          <a:prstGeom prst="rect">
+            <a:avLst/>
+          </a:prstGeom>
+          <a:noFill/>
+        </p:spPr>
+        <p:txBody>
+          <a:bodyPr wrap="square">
+            <a:noAutofit/>
+          </a:bodyPr>
+          <a:lstStyle/>
+          <a:p>
+            <a:pPr algn="r">
+              <a:lnSpc>
+                <a:spcPts val="2200"/>
+              </a:lnSpc>
+              <a:defRPr sz="1000" b="0">
+                <a:solidFill>
+                  <a:srgbClr val="666666"/>
+                </a:solidFill>
+                <a:latin typeface="Calibri"/>
+              </a:defRPr>
+            </a:pPr>
+            <a:r>
+              <a:t>learn_uvm2017_sv_verilator / Module 3</a:t>
+            </a:r>
+          </a:p>
+        </p:txBody>
+      </p:sp>
+    </p:spTree>
+  </p:cSld>
+  <p:clrMapOvr>
+    <a:masterClrMapping/>
+  </p:clrMapOvr>
+</p:sld>
+</file>
+
+<file path=ppt/slides/slide63.xml><?xml version="1.0" encoding="utf-8"?>
+<p:sld xmlns:a="http://schemas.openxmlformats.org/drawingml/2006/main" xmlns:p="http://schemas.openxmlformats.org/presentationml/2006/main" xmlns:r="http://schemas.openxmlformats.org/officeDocument/2006/relationships">
+  <p:cSld>
+    <p:spTree>
+      <p:nvGrpSpPr>
+        <p:cNvPr id="1" name=""/>
+        <p:cNvGrpSpPr/>
+        <p:nvPr/>
+      </p:nvGrpSpPr>
+      <p:grpSpPr/>
+      <p:sp>
+        <p:nvSpPr>
+          <p:cNvPr id="2" name="TextBox 1"/>
+          <p:cNvSpPr txBox="1"/>
+          <p:nvPr/>
+        </p:nvSpPr>
+        <p:spPr>
+          <a:xfrm>
+            <a:off x="548640" y="411480"/>
+            <a:ext cx="11064240" cy="777240"/>
+          </a:xfrm>
+          <a:prstGeom prst="rect">
+            <a:avLst/>
+          </a:prstGeom>
+          <a:noFill/>
+        </p:spPr>
+        <p:txBody>
+          <a:bodyPr wrap="square">
+            <a:noAutofit/>
+          </a:bodyPr>
+          <a:lstStyle/>
+          <a:p>
+            <a:pPr>
+              <a:lnSpc>
+                <a:spcPts val="2200"/>
+              </a:lnSpc>
+              <a:defRPr sz="2800" b="1">
+                <a:solidFill>
+                  <a:srgbClr val="1A1A2E"/>
+                </a:solidFill>
+                <a:latin typeface="Calibri"/>
+              </a:defRPr>
+            </a:pPr>
+            <a:r>
+              <a:t>Example 4: ConfigDB</a:t>
+            </a:r>
+          </a:p>
+        </p:txBody>
+      </p:sp>
+      <p:sp>
+        <p:nvSpPr>
+          <p:cNvPr id="3" name="TextBox 2"/>
+          <p:cNvSpPr txBox="1"/>
+          <p:nvPr/>
+        </p:nvSpPr>
+        <p:spPr>
+          <a:xfrm>
+            <a:off x="548640" y="1234440"/>
+            <a:ext cx="11064240" cy="4937760"/>
+          </a:xfrm>
+          <a:prstGeom prst="rect">
+            <a:avLst/>
+          </a:prstGeom>
+          <a:noFill/>
+        </p:spPr>
+        <p:txBody>
+          <a:bodyPr wrap="square">
+            <a:noAutofit/>
+          </a:bodyPr>
+          <a:lstStyle/>
+          <a:p>
+            <a:pPr>
+              <a:lnSpc>
+                <a:spcPts val="2200"/>
+              </a:lnSpc>
+              <a:spcAft>
+                <a:spcPts val="1000"/>
+              </a:spcAft>
+              <a:defRPr sz="2000" b="0">
+                <a:solidFill>
+                  <a:srgbClr val="333333"/>
+                </a:solidFill>
+                <a:latin typeface="Calibri"/>
+              </a:defRPr>
+            </a:pPr>
+            <a:r>
+              <a:t>• Setting Configuration: Global and component-specific</a:t>
+            </a:r>
+          </a:p>
+          <a:p>
+            <a:pPr>
+              <a:lnSpc>
+                <a:spcPts val="2200"/>
+              </a:lnSpc>
+              <a:spcAft>
+                <a:spcPts val="1000"/>
+              </a:spcAft>
+              <a:defRPr sz="2000" b="0">
+                <a:solidFill>
+                  <a:srgbClr val="333333"/>
+                </a:solidFill>
+                <a:latin typeface="Calibri"/>
+              </a:defRPr>
+            </a:pPr>
+            <a:r>
+              <a:t>• Getting Configuration: Hierarchical lookup</a:t>
+            </a:r>
+          </a:p>
+          <a:p>
+            <a:pPr>
+              <a:lnSpc>
+                <a:spcPts val="2200"/>
+              </a:lnSpc>
+              <a:spcAft>
+                <a:spcPts val="1000"/>
+              </a:spcAft>
+              <a:defRPr sz="2000" b="0">
+                <a:solidFill>
+                  <a:srgbClr val="333333"/>
+                </a:solidFill>
+                <a:latin typeface="Calibri"/>
+              </a:defRPr>
+            </a:pPr>
+            <a:r>
+              <a:t>• Configuration Objects: Complex configuration data</a:t>
+            </a:r>
+          </a:p>
+        </p:txBody>
+      </p:sp>
+      <p:sp>
+        <p:nvSpPr>
+          <p:cNvPr id="4" name="TextBox 3"/>
+          <p:cNvSpPr txBox="1"/>
+          <p:nvPr/>
+        </p:nvSpPr>
+        <p:spPr>
+          <a:xfrm>
+            <a:off x="548640" y="6355080"/>
+            <a:ext cx="11064240" cy="320040"/>
+          </a:xfrm>
+          <a:prstGeom prst="rect">
+            <a:avLst/>
+          </a:prstGeom>
+          <a:noFill/>
+        </p:spPr>
+        <p:txBody>
+          <a:bodyPr wrap="square">
+            <a:noAutofit/>
+          </a:bodyPr>
+          <a:lstStyle/>
+          <a:p>
+            <a:pPr algn="r">
+              <a:lnSpc>
+                <a:spcPts val="2200"/>
+              </a:lnSpc>
+              <a:defRPr sz="1000" b="0">
+                <a:solidFill>
+                  <a:srgbClr val="666666"/>
+                </a:solidFill>
+                <a:latin typeface="Calibri"/>
+              </a:defRPr>
+            </a:pPr>
+            <a:r>
+              <a:t>learn_uvm2017_sv_verilator / Module 3</a:t>
+            </a:r>
+          </a:p>
+        </p:txBody>
+      </p:sp>
+    </p:spTree>
+  </p:cSld>
+  <p:clrMapOvr>
+    <a:masterClrMapping/>
+  </p:clrMapOvr>
+</p:sld>
+</file>
+
+<file path=ppt/slides/slide64.xml><?xml version="1.0" encoding="utf-8"?>
+<p:sld xmlns:a="http://schemas.openxmlformats.org/drawingml/2006/main" xmlns:p="http://schemas.openxmlformats.org/presentationml/2006/main" xmlns:r="http://schemas.openxmlformats.org/officeDocument/2006/relationships">
+  <p:cSld>
+    <p:spTree>
+      <p:nvGrpSpPr>
+        <p:cNvPr id="1" name=""/>
+        <p:cNvGrpSpPr/>
+        <p:nvPr/>
+      </p:nvGrpSpPr>
+      <p:grpSpPr/>
+      <p:sp>
+        <p:nvSpPr>
+          <p:cNvPr id="2" name="TextBox 1"/>
+          <p:cNvSpPr txBox="1"/>
+          <p:nvPr/>
+        </p:nvSpPr>
+        <p:spPr>
+          <a:xfrm>
+            <a:off x="548640" y="411480"/>
+            <a:ext cx="11064240" cy="777240"/>
+          </a:xfrm>
+          <a:prstGeom prst="rect">
+            <a:avLst/>
+          </a:prstGeom>
+          <a:noFill/>
+        </p:spPr>
+        <p:txBody>
+          <a:bodyPr wrap="square">
+            <a:noAutofit/>
+          </a:bodyPr>
+          <a:lstStyle/>
+          <a:p>
+            <a:pPr>
+              <a:lnSpc>
+                <a:spcPts val="2200"/>
+              </a:lnSpc>
+              <a:defRPr sz="2800" b="1">
+                <a:solidFill>
+                  <a:srgbClr val="1A1A2E"/>
+                </a:solidFill>
+                <a:latin typeface="Calibri"/>
+              </a:defRPr>
+            </a:pPr>
+            <a:r>
+              <a:t>Demo: ConfigDB</a:t>
+            </a:r>
+          </a:p>
+        </p:txBody>
+      </p:sp>
+      <p:sp>
+        <p:nvSpPr>
+          <p:cNvPr id="3" name="TextBox 2"/>
+          <p:cNvSpPr txBox="1"/>
+          <p:nvPr/>
+        </p:nvSpPr>
+        <p:spPr>
+          <a:xfrm>
+            <a:off x="548640" y="1051560"/>
+            <a:ext cx="11064240" cy="914400"/>
+          </a:xfrm>
+          <a:prstGeom prst="rect">
+            <a:avLst/>
+          </a:prstGeom>
+          <a:solidFill>
+            <a:srgbClr val="F4F4F4"/>
+          </a:solidFill>
+        </p:spPr>
+        <p:txBody>
+          <a:bodyPr wrap="square">
+            <a:noAutofit/>
+          </a:bodyPr>
+          <a:lstStyle/>
+          <a:p>
+            <a:pPr>
+              <a:lnSpc>
+                <a:spcPts val="2200"/>
+              </a:lnSpc>
+              <a:spcAft>
+                <a:spcPts val="200"/>
+              </a:spcAft>
+              <a:defRPr sz="2000" b="0">
+                <a:solidFill>
+                  <a:srgbClr val="333333"/>
+                </a:solidFill>
+                <a:latin typeface="Consolas"/>
+              </a:defRPr>
+            </a:pPr>
+            <a:r>
+              <a:t>$ ./scripts/module3.sh --configdb</a:t>
+            </a:r>
+          </a:p>
+        </p:txBody>
+      </p:sp>
+      <p:pic>
+        <p:nvPicPr>
+          <p:cNvPr id="4" name="Picture 3" descr="ex04_configdb.png"/>
+          <p:cNvPicPr>
+            <a:picLocks noChangeAspect="1"/>
+          </p:cNvPicPr>
+          <p:nvPr/>
+        </p:nvPicPr>
+        <p:blipFill>
+          <a:blip r:embed="rId2"/>
+          <a:stretch>
+            <a:fillRect/>
+          </a:stretch>
+        </p:blipFill>
+        <p:spPr>
+          <a:xfrm>
+            <a:off x="548640" y="1965960"/>
+            <a:ext cx="7071358" cy="3977639"/>
+          </a:xfrm>
+          <a:prstGeom prst="rect">
+            <a:avLst/>
+          </a:prstGeom>
+        </p:spPr>
+      </p:pic>
+      <p:sp>
+        <p:nvSpPr>
+          <p:cNvPr id="5" name="TextBox 4"/>
+          <p:cNvSpPr txBox="1"/>
+          <p:nvPr/>
+        </p:nvSpPr>
+        <p:spPr>
+          <a:xfrm>
+            <a:off x="548640" y="6355080"/>
+            <a:ext cx="11064240" cy="320040"/>
+          </a:xfrm>
+          <a:prstGeom prst="rect">
+            <a:avLst/>
+          </a:prstGeom>
+          <a:noFill/>
+        </p:spPr>
+        <p:txBody>
+          <a:bodyPr wrap="square">
+            <a:noAutofit/>
+          </a:bodyPr>
+          <a:lstStyle/>
+          <a:p>
+            <a:pPr algn="r">
+              <a:lnSpc>
+                <a:spcPts val="2200"/>
+              </a:lnSpc>
+              <a:defRPr sz="1000" b="0">
+                <a:solidFill>
+                  <a:srgbClr val="666666"/>
+                </a:solidFill>
+                <a:latin typeface="Calibri"/>
+              </a:defRPr>
+            </a:pPr>
+            <a:r>
+              <a:t>learn_uvm2017_sv_verilator / Module 3</a:t>
+            </a:r>
+          </a:p>
+        </p:txBody>
+      </p:sp>
+    </p:spTree>
+  </p:cSld>
+  <p:clrMapOvr>
+    <a:masterClrMapping/>
+  </p:clrMapOvr>
+</p:sld>
+</file>
+
+<file path=ppt/slides/slide65.xml><?xml version="1.0" encoding="utf-8"?>
+<p:sld xmlns:a="http://schemas.openxmlformats.org/drawingml/2006/main" xmlns:p="http://schemas.openxmlformats.org/presentationml/2006/main" xmlns:r="http://schemas.openxmlformats.org/officeDocument/2006/relationships">
+  <p:cSld>
+    <p:spTree>
+      <p:nvGrpSpPr>
+        <p:cNvPr id="1" name=""/>
+        <p:cNvGrpSpPr/>
+        <p:nvPr/>
+      </p:nvGrpSpPr>
+      <p:grpSpPr/>
+      <p:sp>
+        <p:nvSpPr>
+          <p:cNvPr id="2" name="TextBox 1"/>
+          <p:cNvSpPr txBox="1"/>
+          <p:nvPr/>
+        </p:nvSpPr>
+        <p:spPr>
+          <a:xfrm>
+            <a:off x="548640" y="411480"/>
+            <a:ext cx="11064240" cy="777240"/>
+          </a:xfrm>
+          <a:prstGeom prst="rect">
+            <a:avLst/>
+          </a:prstGeom>
+          <a:noFill/>
+        </p:spPr>
+        <p:txBody>
+          <a:bodyPr wrap="square">
+            <a:noAutofit/>
+          </a:bodyPr>
+          <a:lstStyle/>
+          <a:p>
+            <a:pPr>
+              <a:lnSpc>
+                <a:spcPts val="2200"/>
+              </a:lnSpc>
+              <a:defRPr sz="2800" b="1">
+                <a:solidFill>
+                  <a:srgbClr val="1A1A2E"/>
+                </a:solidFill>
+                <a:latin typeface="Calibri"/>
+              </a:defRPr>
+            </a:pPr>
+            <a:r>
+              <a:t>Example 5: Factory</a:t>
+            </a:r>
+          </a:p>
+        </p:txBody>
+      </p:sp>
+      <p:sp>
+        <p:nvSpPr>
+          <p:cNvPr id="3" name="TextBox 2"/>
+          <p:cNvSpPr txBox="1"/>
+          <p:nvPr/>
+        </p:nvSpPr>
+        <p:spPr>
+          <a:xfrm>
+            <a:off x="548640" y="1234440"/>
+            <a:ext cx="11064240" cy="4937760"/>
+          </a:xfrm>
+          <a:prstGeom prst="rect">
+            <a:avLst/>
+          </a:prstGeom>
+          <a:noFill/>
+        </p:spPr>
+        <p:txBody>
+          <a:bodyPr wrap="square">
+            <a:noAutofit/>
+          </a:bodyPr>
+          <a:lstStyle/>
+          <a:p>
+            <a:pPr>
+              <a:lnSpc>
+                <a:spcPts val="2200"/>
+              </a:lnSpc>
+              <a:spcAft>
+                <a:spcPts val="1000"/>
+              </a:spcAft>
+              <a:defRPr sz="2000" b="0">
+                <a:solidFill>
+                  <a:srgbClr val="333333"/>
+                </a:solidFill>
+                <a:latin typeface="Calibri"/>
+              </a:defRPr>
+            </a:pPr>
+            <a:r>
+              <a:t>• Factory Registration: Automatic registration via</a:t>
+            </a:r>
+          </a:p>
+          <a:p>
+            <a:pPr>
+              <a:lnSpc>
+                <a:spcPts val="2200"/>
+              </a:lnSpc>
+              <a:spcAft>
+                <a:spcPts val="1000"/>
+              </a:spcAft>
+              <a:defRPr sz="2000" b="0">
+                <a:solidFill>
+                  <a:srgbClr val="333333"/>
+                </a:solidFill>
+                <a:latin typeface="Calibri"/>
+              </a:defRPr>
+            </a:pPr>
+            <a:r>
+              <a:t>      `uvm_object_utils`</a:t>
+            </a:r>
+          </a:p>
+          <a:p>
+            <a:pPr>
+              <a:lnSpc>
+                <a:spcPts val="2200"/>
+              </a:lnSpc>
+              <a:spcAft>
+                <a:spcPts val="1000"/>
+              </a:spcAft>
+              <a:defRPr sz="2000" b="0">
+                <a:solidFill>
+                  <a:srgbClr val="333333"/>
+                </a:solidFill>
+                <a:latin typeface="Calibri"/>
+              </a:defRPr>
+            </a:pPr>
+            <a:r>
+              <a:t>• Factory Creation: Using `type_id::create()`</a:t>
+            </a:r>
+          </a:p>
+          <a:p>
+            <a:pPr>
+              <a:lnSpc>
+                <a:spcPts val="2200"/>
+              </a:lnSpc>
+              <a:spcAft>
+                <a:spcPts val="1000"/>
+              </a:spcAft>
+              <a:defRPr sz="2000" b="0">
+                <a:solidFill>
+                  <a:srgbClr val="333333"/>
+                </a:solidFill>
+                <a:latin typeface="Calibri"/>
+              </a:defRPr>
+            </a:pPr>
+            <a:r>
+              <a:t>• Type Override: Substituting base class with extended</a:t>
+            </a:r>
+          </a:p>
+          <a:p>
+            <a:pPr>
+              <a:lnSpc>
+                <a:spcPts val="2200"/>
+              </a:lnSpc>
+              <a:spcAft>
+                <a:spcPts val="1000"/>
+              </a:spcAft>
+              <a:defRPr sz="2000" b="0">
+                <a:solidFill>
+                  <a:srgbClr val="333333"/>
+                </a:solidFill>
+                <a:latin typeface="Calibri"/>
+              </a:defRPr>
+            </a:pPr>
+            <a:r>
+              <a:t>      class</a:t>
+            </a:r>
+          </a:p>
+        </p:txBody>
+      </p:sp>
+      <p:sp>
+        <p:nvSpPr>
+          <p:cNvPr id="4" name="TextBox 3"/>
+          <p:cNvSpPr txBox="1"/>
+          <p:nvPr/>
+        </p:nvSpPr>
+        <p:spPr>
+          <a:xfrm>
+            <a:off x="548640" y="6355080"/>
+            <a:ext cx="11064240" cy="320040"/>
+          </a:xfrm>
+          <a:prstGeom prst="rect">
+            <a:avLst/>
+          </a:prstGeom>
+          <a:noFill/>
+        </p:spPr>
+        <p:txBody>
+          <a:bodyPr wrap="square">
+            <a:noAutofit/>
+          </a:bodyPr>
+          <a:lstStyle/>
+          <a:p>
+            <a:pPr algn="r">
+              <a:lnSpc>
+                <a:spcPts val="2200"/>
+              </a:lnSpc>
+              <a:defRPr sz="1000" b="0">
+                <a:solidFill>
+                  <a:srgbClr val="666666"/>
+                </a:solidFill>
+                <a:latin typeface="Calibri"/>
+              </a:defRPr>
+            </a:pPr>
+            <a:r>
+              <a:t>learn_uvm2017_sv_verilator / Module 3</a:t>
+            </a:r>
+          </a:p>
+        </p:txBody>
+      </p:sp>
+    </p:spTree>
+  </p:cSld>
+  <p:clrMapOvr>
+    <a:masterClrMapping/>
+  </p:clrMapOvr>
+</p:sld>
+</file>
+
+<file path=ppt/slides/slide66.xml><?xml version="1.0" encoding="utf-8"?>
+<p:sld xmlns:a="http://schemas.openxmlformats.org/drawingml/2006/main" xmlns:p="http://schemas.openxmlformats.org/presentationml/2006/main" xmlns:r="http://schemas.openxmlformats.org/officeDocument/2006/relationships">
+  <p:cSld>
+    <p:spTree>
+      <p:nvGrpSpPr>
+        <p:cNvPr id="1" name=""/>
+        <p:cNvGrpSpPr/>
+        <p:nvPr/>
+      </p:nvGrpSpPr>
+      <p:grpSpPr/>
+      <p:sp>
+        <p:nvSpPr>
+          <p:cNvPr id="2" name="TextBox 1"/>
+          <p:cNvSpPr txBox="1"/>
+          <p:nvPr/>
+        </p:nvSpPr>
+        <p:spPr>
+          <a:xfrm>
+            <a:off x="548640" y="411480"/>
+            <a:ext cx="11064240" cy="777240"/>
+          </a:xfrm>
+          <a:prstGeom prst="rect">
+            <a:avLst/>
+          </a:prstGeom>
+          <a:noFill/>
+        </p:spPr>
+        <p:txBody>
+          <a:bodyPr wrap="square">
+            <a:noAutofit/>
+          </a:bodyPr>
+          <a:lstStyle/>
+          <a:p>
+            <a:pPr>
+              <a:lnSpc>
+                <a:spcPts val="2200"/>
+              </a:lnSpc>
+              <a:defRPr sz="2800" b="1">
+                <a:solidFill>
+                  <a:srgbClr val="1A1A2E"/>
+                </a:solidFill>
+                <a:latin typeface="Calibri"/>
+              </a:defRPr>
+            </a:pPr>
+            <a:r>
+              <a:t>Demo: Factory</a:t>
+            </a:r>
+          </a:p>
+        </p:txBody>
+      </p:sp>
+      <p:sp>
+        <p:nvSpPr>
+          <p:cNvPr id="3" name="TextBox 2"/>
+          <p:cNvSpPr txBox="1"/>
+          <p:nvPr/>
+        </p:nvSpPr>
+        <p:spPr>
+          <a:xfrm>
+            <a:off x="548640" y="1051560"/>
+            <a:ext cx="11064240" cy="914400"/>
+          </a:xfrm>
+          <a:prstGeom prst="rect">
+            <a:avLst/>
+          </a:prstGeom>
+          <a:solidFill>
+            <a:srgbClr val="F4F4F4"/>
+          </a:solidFill>
+        </p:spPr>
+        <p:txBody>
+          <a:bodyPr wrap="square">
+            <a:noAutofit/>
+          </a:bodyPr>
+          <a:lstStyle/>
+          <a:p>
+            <a:pPr>
+              <a:lnSpc>
+                <a:spcPts val="2200"/>
+              </a:lnSpc>
+              <a:spcAft>
+                <a:spcPts val="200"/>
+              </a:spcAft>
+              <a:defRPr sz="2000" b="0">
+                <a:solidFill>
+                  <a:srgbClr val="333333"/>
+                </a:solidFill>
+                <a:latin typeface="Consolas"/>
+              </a:defRPr>
+            </a:pPr>
+            <a:r>
+              <a:t>$ ./scripts/module3.sh --factory</a:t>
+            </a:r>
+          </a:p>
+        </p:txBody>
+      </p:sp>
+      <p:pic>
+        <p:nvPicPr>
+          <p:cNvPr id="4" name="Picture 3" descr="ex05_factory.png"/>
+          <p:cNvPicPr>
+            <a:picLocks noChangeAspect="1"/>
+          </p:cNvPicPr>
+          <p:nvPr/>
+        </p:nvPicPr>
+        <p:blipFill>
+          <a:blip r:embed="rId2"/>
+          <a:stretch>
+            <a:fillRect/>
+          </a:stretch>
+        </p:blipFill>
+        <p:spPr>
+          <a:xfrm>
+            <a:off x="548640" y="1965960"/>
+            <a:ext cx="7071358" cy="3977639"/>
+          </a:xfrm>
+          <a:prstGeom prst="rect">
+            <a:avLst/>
+          </a:prstGeom>
+        </p:spPr>
+      </p:pic>
+      <p:sp>
+        <p:nvSpPr>
+          <p:cNvPr id="5" name="TextBox 4"/>
+          <p:cNvSpPr txBox="1"/>
+          <p:nvPr/>
+        </p:nvSpPr>
+        <p:spPr>
+          <a:xfrm>
+            <a:off x="548640" y="6355080"/>
+            <a:ext cx="11064240" cy="320040"/>
+          </a:xfrm>
+          <a:prstGeom prst="rect">
+            <a:avLst/>
+          </a:prstGeom>
+          <a:noFill/>
+        </p:spPr>
+        <p:txBody>
+          <a:bodyPr wrap="square">
+            <a:noAutofit/>
+          </a:bodyPr>
+          <a:lstStyle/>
+          <a:p>
+            <a:pPr algn="r">
+              <a:lnSpc>
+                <a:spcPts val="2200"/>
+              </a:lnSpc>
+              <a:defRPr sz="1000" b="0">
+                <a:solidFill>
+                  <a:srgbClr val="666666"/>
+                </a:solidFill>
+                <a:latin typeface="Calibri"/>
+              </a:defRPr>
+            </a:pPr>
+            <a:r>
+              <a:t>learn_uvm2017_sv_verilator / Module 3</a:t>
+            </a:r>
+          </a:p>
+        </p:txBody>
+      </p:sp>
+    </p:spTree>
+  </p:cSld>
+  <p:clrMapOvr>
+    <a:masterClrMapping/>
+  </p:clrMapOvr>
+</p:sld>
+</file>
+
+<file path=ppt/slides/slide67.xml><?xml version="1.0" encoding="utf-8"?>
+<p:sld xmlns:a="http://schemas.openxmlformats.org/drawingml/2006/main" xmlns:p="http://schemas.openxmlformats.org/presentationml/2006/main" xmlns:r="http://schemas.openxmlformats.org/officeDocument/2006/relationships">
+  <p:cSld>
+    <p:spTree>
+      <p:nvGrpSpPr>
+        <p:cNvPr id="1" name=""/>
+        <p:cNvGrpSpPr/>
+        <p:nvPr/>
+      </p:nvGrpSpPr>
+      <p:grpSpPr/>
+      <p:sp>
+        <p:nvSpPr>
+          <p:cNvPr id="2" name="TextBox 1"/>
+          <p:cNvSpPr txBox="1"/>
+          <p:nvPr/>
+        </p:nvSpPr>
+        <p:spPr>
+          <a:xfrm>
+            <a:off x="548640" y="411480"/>
+            <a:ext cx="11064240" cy="777240"/>
+          </a:xfrm>
+          <a:prstGeom prst="rect">
+            <a:avLst/>
+          </a:prstGeom>
+          <a:noFill/>
+        </p:spPr>
+        <p:txBody>
+          <a:bodyPr wrap="square">
+            <a:noAutofit/>
+          </a:bodyPr>
+          <a:lstStyle/>
+          <a:p>
+            <a:pPr>
+              <a:lnSpc>
+                <a:spcPts val="2200"/>
+              </a:lnSpc>
+              <a:defRPr sz="2800" b="1">
+                <a:solidFill>
+                  <a:srgbClr val="1A1A2E"/>
+                </a:solidFill>
+                <a:latin typeface="Calibri"/>
+              </a:defRPr>
+            </a:pPr>
+            <a:r>
+              <a:t>Example 6: Objections</a:t>
+            </a:r>
+          </a:p>
+        </p:txBody>
+      </p:sp>
+      <p:sp>
+        <p:nvSpPr>
+          <p:cNvPr id="3" name="TextBox 2"/>
+          <p:cNvSpPr txBox="1"/>
+          <p:nvPr/>
+        </p:nvSpPr>
+        <p:spPr>
+          <a:xfrm>
+            <a:off x="548640" y="1234440"/>
+            <a:ext cx="11064240" cy="4937760"/>
+          </a:xfrm>
+          <a:prstGeom prst="rect">
+            <a:avLst/>
+          </a:prstGeom>
+          <a:noFill/>
+        </p:spPr>
+        <p:txBody>
+          <a:bodyPr wrap="square">
+            <a:noAutofit/>
+          </a:bodyPr>
+          <a:lstStyle/>
+          <a:p>
+            <a:pPr>
+              <a:lnSpc>
+                <a:spcPts val="2200"/>
+              </a:lnSpc>
+              <a:spcAft>
+                <a:spcPts val="1000"/>
+              </a:spcAft>
+              <a:defRPr sz="2000" b="0">
+                <a:solidFill>
+                  <a:srgbClr val="333333"/>
+                </a:solidFill>
+                <a:latin typeface="Calibri"/>
+              </a:defRPr>
+            </a:pPr>
+            <a:r>
+              <a:t>• Raising Objections: Keep simulation running</a:t>
+            </a:r>
+          </a:p>
+          <a:p>
+            <a:pPr>
+              <a:lnSpc>
+                <a:spcPts val="2200"/>
+              </a:lnSpc>
+              <a:spcAft>
+                <a:spcPts val="1000"/>
+              </a:spcAft>
+              <a:defRPr sz="2000" b="0">
+                <a:solidFill>
+                  <a:srgbClr val="333333"/>
+                </a:solidFill>
+                <a:latin typeface="Calibri"/>
+              </a:defRPr>
+            </a:pPr>
+            <a:r>
+              <a:t>• Dropping Objections: Allow phase completion</a:t>
+            </a:r>
+          </a:p>
+          <a:p>
+            <a:pPr>
+              <a:lnSpc>
+                <a:spcPts val="2200"/>
+              </a:lnSpc>
+              <a:spcAft>
+                <a:spcPts val="1000"/>
+              </a:spcAft>
+              <a:defRPr sz="2000" b="0">
+                <a:solidFill>
+                  <a:srgbClr val="333333"/>
+                </a:solidFill>
+                <a:latin typeface="Calibri"/>
+              </a:defRPr>
+            </a:pPr>
+            <a:r>
+              <a:t>• Multiple Objections: Per-component objection</a:t>
+            </a:r>
+          </a:p>
+          <a:p>
+            <a:pPr>
+              <a:lnSpc>
+                <a:spcPts val="2200"/>
+              </a:lnSpc>
+              <a:spcAft>
+                <a:spcPts val="1000"/>
+              </a:spcAft>
+              <a:defRPr sz="2000" b="0">
+                <a:solidFill>
+                  <a:srgbClr val="333333"/>
+                </a:solidFill>
+                <a:latin typeface="Calibri"/>
+              </a:defRPr>
+            </a:pPr>
+            <a:r>
+              <a:t>      tracking</a:t>
+            </a:r>
+          </a:p>
+        </p:txBody>
+      </p:sp>
+      <p:sp>
+        <p:nvSpPr>
+          <p:cNvPr id="4" name="TextBox 3"/>
+          <p:cNvSpPr txBox="1"/>
+          <p:nvPr/>
+        </p:nvSpPr>
+        <p:spPr>
+          <a:xfrm>
+            <a:off x="548640" y="6355080"/>
+            <a:ext cx="11064240" cy="320040"/>
+          </a:xfrm>
+          <a:prstGeom prst="rect">
+            <a:avLst/>
+          </a:prstGeom>
+          <a:noFill/>
+        </p:spPr>
+        <p:txBody>
+          <a:bodyPr wrap="square">
+            <a:noAutofit/>
+          </a:bodyPr>
+          <a:lstStyle/>
+          <a:p>
+            <a:pPr algn="r">
+              <a:lnSpc>
+                <a:spcPts val="2200"/>
+              </a:lnSpc>
+              <a:defRPr sz="1000" b="0">
+                <a:solidFill>
+                  <a:srgbClr val="666666"/>
+                </a:solidFill>
+                <a:latin typeface="Calibri"/>
+              </a:defRPr>
+            </a:pPr>
+            <a:r>
+              <a:t>learn_uvm2017_sv_verilator / Module 3</a:t>
+            </a:r>
+          </a:p>
+        </p:txBody>
+      </p:sp>
+    </p:spTree>
+  </p:cSld>
+  <p:clrMapOvr>
+    <a:masterClrMapping/>
+  </p:clrMapOvr>
+</p:sld>
+</file>
+
+<file path=ppt/slides/slide68.xml><?xml version="1.0" encoding="utf-8"?>
+<p:sld xmlns:a="http://schemas.openxmlformats.org/drawingml/2006/main" xmlns:p="http://schemas.openxmlformats.org/presentationml/2006/main" xmlns:r="http://schemas.openxmlformats.org/officeDocument/2006/relationships">
+  <p:cSld>
+    <p:spTree>
+      <p:nvGrpSpPr>
+        <p:cNvPr id="1" name=""/>
+        <p:cNvGrpSpPr/>
+        <p:nvPr/>
+      </p:nvGrpSpPr>
+      <p:grpSpPr/>
+      <p:sp>
+        <p:nvSpPr>
+          <p:cNvPr id="2" name="TextBox 1"/>
+          <p:cNvSpPr txBox="1"/>
+          <p:nvPr/>
+        </p:nvSpPr>
+        <p:spPr>
+          <a:xfrm>
+            <a:off x="548640" y="411480"/>
+            <a:ext cx="11064240" cy="777240"/>
+          </a:xfrm>
+          <a:prstGeom prst="rect">
+            <a:avLst/>
+          </a:prstGeom>
+          <a:noFill/>
+        </p:spPr>
+        <p:txBody>
+          <a:bodyPr wrap="square">
+            <a:noAutofit/>
+          </a:bodyPr>
+          <a:lstStyle/>
+          <a:p>
+            <a:pPr>
+              <a:lnSpc>
+                <a:spcPts val="2200"/>
+              </a:lnSpc>
+              <a:defRPr sz="2800" b="1">
+                <a:solidFill>
+                  <a:srgbClr val="1A1A2E"/>
+                </a:solidFill>
+                <a:latin typeface="Calibri"/>
+              </a:defRPr>
+            </a:pPr>
+            <a:r>
+              <a:t>Demo: Objections</a:t>
+            </a:r>
+          </a:p>
+        </p:txBody>
+      </p:sp>
+      <p:sp>
+        <p:nvSpPr>
+          <p:cNvPr id="3" name="TextBox 2"/>
+          <p:cNvSpPr txBox="1"/>
+          <p:nvPr/>
+        </p:nvSpPr>
+        <p:spPr>
+          <a:xfrm>
+            <a:off x="548640" y="1051560"/>
+            <a:ext cx="11064240" cy="914400"/>
+          </a:xfrm>
+          <a:prstGeom prst="rect">
+            <a:avLst/>
+          </a:prstGeom>
+          <a:solidFill>
+            <a:srgbClr val="F4F4F4"/>
+          </a:solidFill>
+        </p:spPr>
+        <p:txBody>
+          <a:bodyPr wrap="square">
+            <a:noAutofit/>
+          </a:bodyPr>
+          <a:lstStyle/>
+          <a:p>
+            <a:pPr>
+              <a:lnSpc>
+                <a:spcPts val="2200"/>
+              </a:lnSpc>
+              <a:spcAft>
+                <a:spcPts val="200"/>
+              </a:spcAft>
+              <a:defRPr sz="2000" b="0">
+                <a:solidFill>
+                  <a:srgbClr val="333333"/>
+                </a:solidFill>
+                <a:latin typeface="Consolas"/>
+              </a:defRPr>
+            </a:pPr>
+            <a:r>
+              <a:t>$ ./scripts/module3.sh --objections</a:t>
+            </a:r>
+          </a:p>
+        </p:txBody>
+      </p:sp>
+      <p:pic>
+        <p:nvPicPr>
+          <p:cNvPr id="4" name="Picture 3" descr="ex06_objections.png"/>
+          <p:cNvPicPr>
+            <a:picLocks noChangeAspect="1"/>
+          </p:cNvPicPr>
+          <p:nvPr/>
+        </p:nvPicPr>
+        <p:blipFill>
+          <a:blip r:embed="rId2"/>
+          <a:stretch>
+            <a:fillRect/>
+          </a:stretch>
+        </p:blipFill>
+        <p:spPr>
+          <a:xfrm>
+            <a:off x="548640" y="1965960"/>
+            <a:ext cx="7071358" cy="3977639"/>
+          </a:xfrm>
+          <a:prstGeom prst="rect">
+            <a:avLst/>
+          </a:prstGeom>
+        </p:spPr>
+      </p:pic>
+      <p:sp>
+        <p:nvSpPr>
+          <p:cNvPr id="5" name="TextBox 4"/>
+          <p:cNvSpPr txBox="1"/>
+          <p:nvPr/>
+        </p:nvSpPr>
+        <p:spPr>
+          <a:xfrm>
+            <a:off x="548640" y="6355080"/>
+            <a:ext cx="11064240" cy="320040"/>
+          </a:xfrm>
+          <a:prstGeom prst="rect">
+            <a:avLst/>
+          </a:prstGeom>
+          <a:noFill/>
+        </p:spPr>
+        <p:txBody>
+          <a:bodyPr wrap="square">
+            <a:noAutofit/>
+          </a:bodyPr>
+          <a:lstStyle/>
+          <a:p>
+            <a:pPr algn="r">
+              <a:lnSpc>
+                <a:spcPts val="2200"/>
+              </a:lnSpc>
+              <a:defRPr sz="1000" b="0">
+                <a:solidFill>
+                  <a:srgbClr val="666666"/>
+                </a:solidFill>
+                <a:latin typeface="Calibri"/>
+              </a:defRPr>
+            </a:pPr>
+            <a:r>
+              <a:t>learn_uvm2017_sv_verilator / Module 3</a:t>
+            </a:r>
+          </a:p>
+        </p:txBody>
+      </p:sp>
+    </p:spTree>
+  </p:cSld>
+  <p:clrMapOvr>
+    <a:masterClrMapping/>
+  </p:clrMapOvr>
+</p:sld>
+</file>
+
+<file path=ppt/slides/slide69.xml><?xml version="1.0" encoding="utf-8"?>
+<p:sld xmlns:a="http://schemas.openxmlformats.org/drawingml/2006/main" xmlns:p="http://schemas.openxmlformats.org/presentationml/2006/main" xmlns:r="http://schemas.openxmlformats.org/officeDocument/2006/relationships">
+  <p:cSld>
+    <p:spTree>
+      <p:nvGrpSpPr>
+        <p:cNvPr id="1" name=""/>
+        <p:cNvGrpSpPr/>
+        <p:nvPr/>
+      </p:nvGrpSpPr>
+      <p:grpSpPr/>
+      <p:sp>
+        <p:nvSpPr>
+          <p:cNvPr id="2" name="TextBox 1"/>
+          <p:cNvSpPr txBox="1"/>
+          <p:nvPr/>
+        </p:nvSpPr>
+        <p:spPr>
+          <a:xfrm>
+            <a:off x="548640" y="2743200"/>
+            <a:ext cx="11064240" cy="1371600"/>
+          </a:xfrm>
+          <a:prstGeom prst="rect">
+            <a:avLst/>
+          </a:prstGeom>
+          <a:noFill/>
+        </p:spPr>
+        <p:txBody>
+          <a:bodyPr wrap="square">
+            <a:noAutofit/>
+          </a:bodyPr>
+          <a:lstStyle/>
+          <a:p>
+            <a:pPr algn="ctr">
+              <a:lnSpc>
+                <a:spcPts val="2200"/>
+              </a:lnSpc>
+              <a:defRPr sz="3600" b="1">
+                <a:solidFill>
+                  <a:srgbClr val="1A1A2E"/>
+                </a:solidFill>
+                <a:latin typeface="Calibri"/>
+              </a:defRPr>
+            </a:pPr>
+            <a:r>
+              <a:t>Practice &amp; assessment</a:t>
+            </a:r>
+          </a:p>
+        </p:txBody>
+      </p:sp>
+      <p:sp>
+        <p:nvSpPr>
+          <p:cNvPr id="3" name="TextBox 2"/>
           <p:cNvSpPr txBox="1"/>
           <p:nvPr/>
         </p:nvSpPr>
@@ -20295,6 +22758,1214 @@
             </a:pPr>
             <a:r>
               <a:t>• UVM Benefits</a:t>
+            </a:r>
+          </a:p>
+        </p:txBody>
+      </p:sp>
+      <p:sp>
+        <p:nvSpPr>
+          <p:cNvPr id="4" name="TextBox 3"/>
+          <p:cNvSpPr txBox="1"/>
+          <p:nvPr/>
+        </p:nvSpPr>
+        <p:spPr>
+          <a:xfrm>
+            <a:off x="548640" y="6355080"/>
+            <a:ext cx="11064240" cy="320040"/>
+          </a:xfrm>
+          <a:prstGeom prst="rect">
+            <a:avLst/>
+          </a:prstGeom>
+          <a:noFill/>
+        </p:spPr>
+        <p:txBody>
+          <a:bodyPr wrap="square">
+            <a:noAutofit/>
+          </a:bodyPr>
+          <a:lstStyle/>
+          <a:p>
+            <a:pPr algn="r">
+              <a:lnSpc>
+                <a:spcPts val="2200"/>
+              </a:lnSpc>
+              <a:defRPr sz="1000" b="0">
+                <a:solidFill>
+                  <a:srgbClr val="666666"/>
+                </a:solidFill>
+                <a:latin typeface="Calibri"/>
+              </a:defRPr>
+            </a:pPr>
+            <a:r>
+              <a:t>learn_uvm2017_sv_verilator / Module 3</a:t>
+            </a:r>
+          </a:p>
+        </p:txBody>
+      </p:sp>
+    </p:spTree>
+  </p:cSld>
+  <p:clrMapOvr>
+    <a:masterClrMapping/>
+  </p:clrMapOvr>
+</p:sld>
+</file>
+
+<file path=ppt/slides/slide70.xml><?xml version="1.0" encoding="utf-8"?>
+<p:sld xmlns:a="http://schemas.openxmlformats.org/drawingml/2006/main" xmlns:p="http://schemas.openxmlformats.org/presentationml/2006/main" xmlns:r="http://schemas.openxmlformats.org/officeDocument/2006/relationships">
+  <p:cSld>
+    <p:spTree>
+      <p:nvGrpSpPr>
+        <p:cNvPr id="1" name=""/>
+        <p:cNvGrpSpPr/>
+        <p:nvPr/>
+      </p:nvGrpSpPr>
+      <p:grpSpPr/>
+      <p:sp>
+        <p:nvSpPr>
+          <p:cNvPr id="2" name="TextBox 1"/>
+          <p:cNvSpPr txBox="1"/>
+          <p:nvPr/>
+        </p:nvSpPr>
+        <p:spPr>
+          <a:xfrm>
+            <a:off x="548640" y="411480"/>
+            <a:ext cx="11064240" cy="777240"/>
+          </a:xfrm>
+          <a:prstGeom prst="rect">
+            <a:avLst/>
+          </a:prstGeom>
+          <a:noFill/>
+        </p:spPr>
+        <p:txBody>
+          <a:bodyPr wrap="square">
+            <a:noAutofit/>
+          </a:bodyPr>
+          <a:lstStyle/>
+          <a:p>
+            <a:pPr>
+              <a:lnSpc>
+                <a:spcPts val="2200"/>
+              </a:lnSpc>
+              <a:defRPr sz="2800" b="1">
+                <a:solidFill>
+                  <a:srgbClr val="1A1A2E"/>
+                </a:solidFill>
+                <a:latin typeface="Calibri"/>
+              </a:defRPr>
+            </a:pPr>
+            <a:r>
+              <a:t>What you should know (1/2)</a:t>
+            </a:r>
+          </a:p>
+        </p:txBody>
+      </p:sp>
+      <p:sp>
+        <p:nvSpPr>
+          <p:cNvPr id="3" name="TextBox 2"/>
+          <p:cNvSpPr txBox="1"/>
+          <p:nvPr/>
+        </p:nvSpPr>
+        <p:spPr>
+          <a:xfrm>
+            <a:off x="548640" y="1234440"/>
+            <a:ext cx="11064240" cy="4937760"/>
+          </a:xfrm>
+          <a:prstGeom prst="rect">
+            <a:avLst/>
+          </a:prstGeom>
+          <a:noFill/>
+        </p:spPr>
+        <p:txBody>
+          <a:bodyPr wrap="square">
+            <a:noAutofit/>
+          </a:bodyPr>
+          <a:lstStyle/>
+          <a:p>
+            <a:pPr>
+              <a:lnSpc>
+                <a:spcPts val="2200"/>
+              </a:lnSpc>
+              <a:spcAft>
+                <a:spcPts val="1000"/>
+              </a:spcAft>
+              <a:defRPr sz="2000" b="0">
+                <a:solidFill>
+                  <a:srgbClr val="333333"/>
+                </a:solidFill>
+                <a:latin typeface="Calibri"/>
+              </a:defRPr>
+            </a:pPr>
+            <a:r>
+              <a:t>• Understand UVM class hierarchy (uvm_object vs</a:t>
+            </a:r>
+          </a:p>
+          <a:p>
+            <a:pPr>
+              <a:lnSpc>
+                <a:spcPts val="2200"/>
+              </a:lnSpc>
+              <a:spcAft>
+                <a:spcPts val="1000"/>
+              </a:spcAft>
+              <a:defRPr sz="2000" b="0">
+                <a:solidFill>
+                  <a:srgbClr val="333333"/>
+                </a:solidFill>
+                <a:latin typeface="Calibri"/>
+              </a:defRPr>
+            </a:pPr>
+            <a:r>
+              <a:t>      uvm_component)</a:t>
+            </a:r>
+          </a:p>
+          <a:p>
+            <a:pPr>
+              <a:lnSpc>
+                <a:spcPts val="2200"/>
+              </a:lnSpc>
+              <a:spcAft>
+                <a:spcPts val="1000"/>
+              </a:spcAft>
+              <a:defRPr sz="2000" b="0">
+                <a:solidFill>
+                  <a:srgbClr val="333333"/>
+                </a:solidFill>
+                <a:latin typeface="Calibri"/>
+              </a:defRPr>
+            </a:pPr>
+            <a:r>
+              <a:t>• Master UVM phases (build-time, run-time, cleanup)</a:t>
+            </a:r>
+          </a:p>
+          <a:p>
+            <a:pPr>
+              <a:lnSpc>
+                <a:spcPts val="2200"/>
+              </a:lnSpc>
+              <a:spcAft>
+                <a:spcPts val="1000"/>
+              </a:spcAft>
+              <a:defRPr sz="2000" b="0">
+                <a:solidFill>
+                  <a:srgbClr val="333333"/>
+                </a:solidFill>
+                <a:latin typeface="Calibri"/>
+              </a:defRPr>
+            </a:pPr>
+            <a:r>
+              <a:t>• Use UVM reporting effectively (severity, verbosity,</a:t>
+            </a:r>
+          </a:p>
+          <a:p>
+            <a:pPr>
+              <a:lnSpc>
+                <a:spcPts val="2200"/>
+              </a:lnSpc>
+              <a:spcAft>
+                <a:spcPts val="1000"/>
+              </a:spcAft>
+              <a:defRPr sz="2000" b="0">
+                <a:solidFill>
+                  <a:srgbClr val="333333"/>
+                </a:solidFill>
+                <a:latin typeface="Calibri"/>
+              </a:defRPr>
+            </a:pPr>
+            <a:r>
+              <a:t>      formatting)</a:t>
+            </a:r>
+          </a:p>
+          <a:p>
+            <a:pPr>
+              <a:lnSpc>
+                <a:spcPts val="2200"/>
+              </a:lnSpc>
+              <a:spcAft>
+                <a:spcPts val="1000"/>
+              </a:spcAft>
+              <a:defRPr sz="2000" b="0">
+                <a:solidFill>
+                  <a:srgbClr val="333333"/>
+                </a:solidFill>
+                <a:latin typeface="Calibri"/>
+              </a:defRPr>
+            </a:pPr>
+            <a:r>
+              <a:t>• Configure components using ConfigDB</a:t>
+            </a:r>
+          </a:p>
+          <a:p>
+            <a:pPr>
+              <a:lnSpc>
+                <a:spcPts val="2200"/>
+              </a:lnSpc>
+              <a:spcAft>
+                <a:spcPts val="1000"/>
+              </a:spcAft>
+              <a:defRPr sz="2000" b="0">
+                <a:solidFill>
+                  <a:srgbClr val="333333"/>
+                </a:solidFill>
+                <a:latin typeface="Calibri"/>
+              </a:defRPr>
+            </a:pPr>
+            <a:r>
+              <a:t>• Understand factory pattern (registration, creation,</a:t>
+            </a:r>
+          </a:p>
+          <a:p>
+            <a:pPr>
+              <a:lnSpc>
+                <a:spcPts val="2200"/>
+              </a:lnSpc>
+              <a:spcAft>
+                <a:spcPts val="1000"/>
+              </a:spcAft>
+              <a:defRPr sz="2000" b="0">
+                <a:solidFill>
+                  <a:srgbClr val="333333"/>
+                </a:solidFill>
+                <a:latin typeface="Calibri"/>
+              </a:defRPr>
+            </a:pPr>
+            <a:r>
+              <a:t>      overrides)</a:t>
+            </a:r>
+          </a:p>
+          <a:p>
+            <a:pPr>
+              <a:lnSpc>
+                <a:spcPts val="2200"/>
+              </a:lnSpc>
+              <a:spcAft>
+                <a:spcPts val="1000"/>
+              </a:spcAft>
+              <a:defRPr sz="2000" b="0">
+                <a:solidFill>
+                  <a:srgbClr val="333333"/>
+                </a:solidFill>
+                <a:latin typeface="Calibri"/>
+              </a:defRPr>
+            </a:pPr>
+            <a:r>
+              <a:t>• Control simulation with objections</a:t>
+            </a:r>
+          </a:p>
+        </p:txBody>
+      </p:sp>
+      <p:sp>
+        <p:nvSpPr>
+          <p:cNvPr id="4" name="TextBox 3"/>
+          <p:cNvSpPr txBox="1"/>
+          <p:nvPr/>
+        </p:nvSpPr>
+        <p:spPr>
+          <a:xfrm>
+            <a:off x="548640" y="6355080"/>
+            <a:ext cx="11064240" cy="320040"/>
+          </a:xfrm>
+          <a:prstGeom prst="rect">
+            <a:avLst/>
+          </a:prstGeom>
+          <a:noFill/>
+        </p:spPr>
+        <p:txBody>
+          <a:bodyPr wrap="square">
+            <a:noAutofit/>
+          </a:bodyPr>
+          <a:lstStyle/>
+          <a:p>
+            <a:pPr algn="r">
+              <a:lnSpc>
+                <a:spcPts val="2200"/>
+              </a:lnSpc>
+              <a:defRPr sz="1000" b="0">
+                <a:solidFill>
+                  <a:srgbClr val="666666"/>
+                </a:solidFill>
+                <a:latin typeface="Calibri"/>
+              </a:defRPr>
+            </a:pPr>
+            <a:r>
+              <a:t>learn_uvm2017_sv_verilator / Module 3</a:t>
+            </a:r>
+          </a:p>
+        </p:txBody>
+      </p:sp>
+    </p:spTree>
+  </p:cSld>
+  <p:clrMapOvr>
+    <a:masterClrMapping/>
+  </p:clrMapOvr>
+</p:sld>
+</file>
+
+<file path=ppt/slides/slide71.xml><?xml version="1.0" encoding="utf-8"?>
+<p:sld xmlns:a="http://schemas.openxmlformats.org/drawingml/2006/main" xmlns:p="http://schemas.openxmlformats.org/presentationml/2006/main" xmlns:r="http://schemas.openxmlformats.org/officeDocument/2006/relationships">
+  <p:cSld>
+    <p:spTree>
+      <p:nvGrpSpPr>
+        <p:cNvPr id="1" name=""/>
+        <p:cNvGrpSpPr/>
+        <p:nvPr/>
+      </p:nvGrpSpPr>
+      <p:grpSpPr/>
+      <p:sp>
+        <p:nvSpPr>
+          <p:cNvPr id="2" name="TextBox 1"/>
+          <p:cNvSpPr txBox="1"/>
+          <p:nvPr/>
+        </p:nvSpPr>
+        <p:spPr>
+          <a:xfrm>
+            <a:off x="548640" y="411480"/>
+            <a:ext cx="11064240" cy="777240"/>
+          </a:xfrm>
+          <a:prstGeom prst="rect">
+            <a:avLst/>
+          </a:prstGeom>
+          <a:noFill/>
+        </p:spPr>
+        <p:txBody>
+          <a:bodyPr wrap="square">
+            <a:noAutofit/>
+          </a:bodyPr>
+          <a:lstStyle/>
+          <a:p>
+            <a:pPr>
+              <a:lnSpc>
+                <a:spcPts val="2200"/>
+              </a:lnSpc>
+              <a:defRPr sz="2800" b="1">
+                <a:solidFill>
+                  <a:srgbClr val="1A1A2E"/>
+                </a:solidFill>
+                <a:latin typeface="Calibri"/>
+              </a:defRPr>
+            </a:pPr>
+            <a:r>
+              <a:t>What you should know (2/2)</a:t>
+            </a:r>
+          </a:p>
+        </p:txBody>
+      </p:sp>
+      <p:sp>
+        <p:nvSpPr>
+          <p:cNvPr id="3" name="TextBox 2"/>
+          <p:cNvSpPr txBox="1"/>
+          <p:nvPr/>
+        </p:nvSpPr>
+        <p:spPr>
+          <a:xfrm>
+            <a:off x="548640" y="1234440"/>
+            <a:ext cx="11064240" cy="4937760"/>
+          </a:xfrm>
+          <a:prstGeom prst="rect">
+            <a:avLst/>
+          </a:prstGeom>
+          <a:noFill/>
+        </p:spPr>
+        <p:txBody>
+          <a:bodyPr wrap="square">
+            <a:noAutofit/>
+          </a:bodyPr>
+          <a:lstStyle/>
+          <a:p>
+            <a:pPr>
+              <a:lnSpc>
+                <a:spcPts val="2200"/>
+              </a:lnSpc>
+              <a:spcAft>
+                <a:spcPts val="1000"/>
+              </a:spcAft>
+              <a:defRPr sz="2000" b="0">
+                <a:solidFill>
+                  <a:srgbClr val="333333"/>
+                </a:solidFill>
+                <a:latin typeface="Calibri"/>
+              </a:defRPr>
+            </a:pPr>
+            <a:r>
+              <a:t>• Structure UVM testbenches properly</a:t>
+            </a:r>
+          </a:p>
+        </p:txBody>
+      </p:sp>
+      <p:sp>
+        <p:nvSpPr>
+          <p:cNvPr id="4" name="TextBox 3"/>
+          <p:cNvSpPr txBox="1"/>
+          <p:nvPr/>
+        </p:nvSpPr>
+        <p:spPr>
+          <a:xfrm>
+            <a:off x="548640" y="6355080"/>
+            <a:ext cx="11064240" cy="320040"/>
+          </a:xfrm>
+          <a:prstGeom prst="rect">
+            <a:avLst/>
+          </a:prstGeom>
+          <a:noFill/>
+        </p:spPr>
+        <p:txBody>
+          <a:bodyPr wrap="square">
+            <a:noAutofit/>
+          </a:bodyPr>
+          <a:lstStyle/>
+          <a:p>
+            <a:pPr algn="r">
+              <a:lnSpc>
+                <a:spcPts val="2200"/>
+              </a:lnSpc>
+              <a:defRPr sz="1000" b="0">
+                <a:solidFill>
+                  <a:srgbClr val="666666"/>
+                </a:solidFill>
+                <a:latin typeface="Calibri"/>
+              </a:defRPr>
+            </a:pPr>
+            <a:r>
+              <a:t>learn_uvm2017_sv_verilator / Module 3</a:t>
+            </a:r>
+          </a:p>
+        </p:txBody>
+      </p:sp>
+    </p:spTree>
+  </p:cSld>
+  <p:clrMapOvr>
+    <a:masterClrMapping/>
+  </p:clrMapOvr>
+</p:sld>
+</file>
+
+<file path=ppt/slides/slide72.xml><?xml version="1.0" encoding="utf-8"?>
+<p:sld xmlns:a="http://schemas.openxmlformats.org/drawingml/2006/main" xmlns:p="http://schemas.openxmlformats.org/presentationml/2006/main" xmlns:r="http://schemas.openxmlformats.org/officeDocument/2006/relationships">
+  <p:cSld>
+    <p:spTree>
+      <p:nvGrpSpPr>
+        <p:cNvPr id="1" name=""/>
+        <p:cNvGrpSpPr/>
+        <p:nvPr/>
+      </p:nvGrpSpPr>
+      <p:grpSpPr/>
+      <p:sp>
+        <p:nvSpPr>
+          <p:cNvPr id="2" name="TextBox 1"/>
+          <p:cNvSpPr txBox="1"/>
+          <p:nvPr/>
+        </p:nvSpPr>
+        <p:spPr>
+          <a:xfrm>
+            <a:off x="548640" y="411480"/>
+            <a:ext cx="11064240" cy="777240"/>
+          </a:xfrm>
+          <a:prstGeom prst="rect">
+            <a:avLst/>
+          </a:prstGeom>
+          <a:noFill/>
+        </p:spPr>
+        <p:txBody>
+          <a:bodyPr wrap="square">
+            <a:noAutofit/>
+          </a:bodyPr>
+          <a:lstStyle/>
+          <a:p>
+            <a:pPr>
+              <a:lnSpc>
+                <a:spcPts val="2200"/>
+              </a:lnSpc>
+              <a:defRPr sz="2800" b="1">
+                <a:solidFill>
+                  <a:srgbClr val="1A1A2E"/>
+                </a:solidFill>
+                <a:latin typeface="Calibri"/>
+              </a:defRPr>
+            </a:pPr>
+            <a:r>
+              <a:t>Exercises</a:t>
+            </a:r>
+          </a:p>
+        </p:txBody>
+      </p:sp>
+      <p:sp>
+        <p:nvSpPr>
+          <p:cNvPr id="3" name="TextBox 2"/>
+          <p:cNvSpPr txBox="1"/>
+          <p:nvPr/>
+        </p:nvSpPr>
+        <p:spPr>
+          <a:xfrm>
+            <a:off x="548640" y="1234440"/>
+            <a:ext cx="11064240" cy="4937760"/>
+          </a:xfrm>
+          <a:prstGeom prst="rect">
+            <a:avLst/>
+          </a:prstGeom>
+          <a:noFill/>
+        </p:spPr>
+        <p:txBody>
+          <a:bodyPr wrap="square">
+            <a:noAutofit/>
+          </a:bodyPr>
+          <a:lstStyle/>
+          <a:p>
+            <a:pPr>
+              <a:lnSpc>
+                <a:spcPts val="2200"/>
+              </a:lnSpc>
+              <a:spcAft>
+                <a:spcPts val="1000"/>
+              </a:spcAft>
+              <a:defRPr sz="2000" b="0">
+                <a:solidFill>
+                  <a:srgbClr val="333333"/>
+                </a:solidFill>
+                <a:latin typeface="Calibri"/>
+              </a:defRPr>
+            </a:pPr>
+            <a:r>
+              <a:t>• Class Hierarchy</a:t>
+            </a:r>
+          </a:p>
+          <a:p>
+            <a:pPr>
+              <a:lnSpc>
+                <a:spcPts val="2200"/>
+              </a:lnSpc>
+              <a:spcAft>
+                <a:spcPts val="1000"/>
+              </a:spcAft>
+              <a:defRPr sz="2000" b="0">
+                <a:solidFill>
+                  <a:srgbClr val="333333"/>
+                </a:solidFill>
+                <a:latin typeface="Calibri"/>
+              </a:defRPr>
+            </a:pPr>
+            <a:r>
+              <a:t>• Phases</a:t>
+            </a:r>
+          </a:p>
+          <a:p>
+            <a:pPr>
+              <a:lnSpc>
+                <a:spcPts val="2200"/>
+              </a:lnSpc>
+              <a:spcAft>
+                <a:spcPts val="1000"/>
+              </a:spcAft>
+              <a:defRPr sz="2000" b="0">
+                <a:solidFill>
+                  <a:srgbClr val="333333"/>
+                </a:solidFill>
+                <a:latin typeface="Calibri"/>
+              </a:defRPr>
+            </a:pPr>
+            <a:r>
+              <a:t>• Reporting</a:t>
+            </a:r>
+          </a:p>
+          <a:p>
+            <a:pPr>
+              <a:lnSpc>
+                <a:spcPts val="2200"/>
+              </a:lnSpc>
+              <a:spcAft>
+                <a:spcPts val="1000"/>
+              </a:spcAft>
+              <a:defRPr sz="2000" b="0">
+                <a:solidFill>
+                  <a:srgbClr val="333333"/>
+                </a:solidFill>
+                <a:latin typeface="Calibri"/>
+              </a:defRPr>
+            </a:pPr>
+            <a:r>
+              <a:t>• ConfigDB</a:t>
+            </a:r>
+          </a:p>
+          <a:p>
+            <a:pPr>
+              <a:lnSpc>
+                <a:spcPts val="2200"/>
+              </a:lnSpc>
+              <a:spcAft>
+                <a:spcPts val="1000"/>
+              </a:spcAft>
+              <a:defRPr sz="2000" b="0">
+                <a:solidFill>
+                  <a:srgbClr val="333333"/>
+                </a:solidFill>
+                <a:latin typeface="Calibri"/>
+              </a:defRPr>
+            </a:pPr>
+            <a:r>
+              <a:t>• Factory</a:t>
+            </a:r>
+          </a:p>
+        </p:txBody>
+      </p:sp>
+      <p:sp>
+        <p:nvSpPr>
+          <p:cNvPr id="4" name="TextBox 3"/>
+          <p:cNvSpPr txBox="1"/>
+          <p:nvPr/>
+        </p:nvSpPr>
+        <p:spPr>
+          <a:xfrm>
+            <a:off x="548640" y="6355080"/>
+            <a:ext cx="11064240" cy="320040"/>
+          </a:xfrm>
+          <a:prstGeom prst="rect">
+            <a:avLst/>
+          </a:prstGeom>
+          <a:noFill/>
+        </p:spPr>
+        <p:txBody>
+          <a:bodyPr wrap="square">
+            <a:noAutofit/>
+          </a:bodyPr>
+          <a:lstStyle/>
+          <a:p>
+            <a:pPr algn="r">
+              <a:lnSpc>
+                <a:spcPts val="2200"/>
+              </a:lnSpc>
+              <a:defRPr sz="1000" b="0">
+                <a:solidFill>
+                  <a:srgbClr val="666666"/>
+                </a:solidFill>
+                <a:latin typeface="Calibri"/>
+              </a:defRPr>
+            </a:pPr>
+            <a:r>
+              <a:t>learn_uvm2017_sv_verilator / Module 3</a:t>
+            </a:r>
+          </a:p>
+        </p:txBody>
+      </p:sp>
+    </p:spTree>
+  </p:cSld>
+  <p:clrMapOvr>
+    <a:masterClrMapping/>
+  </p:clrMapOvr>
+</p:sld>
+</file>
+
+<file path=ppt/slides/slide73.xml><?xml version="1.0" encoding="utf-8"?>
+<p:sld xmlns:a="http://schemas.openxmlformats.org/drawingml/2006/main" xmlns:p="http://schemas.openxmlformats.org/presentationml/2006/main" xmlns:r="http://schemas.openxmlformats.org/officeDocument/2006/relationships">
+  <p:cSld>
+    <p:spTree>
+      <p:nvGrpSpPr>
+        <p:cNvPr id="1" name=""/>
+        <p:cNvGrpSpPr/>
+        <p:nvPr/>
+      </p:nvGrpSpPr>
+      <p:grpSpPr/>
+      <p:sp>
+        <p:nvSpPr>
+          <p:cNvPr id="2" name="TextBox 1"/>
+          <p:cNvSpPr txBox="1"/>
+          <p:nvPr/>
+        </p:nvSpPr>
+        <p:spPr>
+          <a:xfrm>
+            <a:off x="548640" y="411480"/>
+            <a:ext cx="11064240" cy="777240"/>
+          </a:xfrm>
+          <a:prstGeom prst="rect">
+            <a:avLst/>
+          </a:prstGeom>
+          <a:noFill/>
+        </p:spPr>
+        <p:txBody>
+          <a:bodyPr wrap="square">
+            <a:noAutofit/>
+          </a:bodyPr>
+          <a:lstStyle/>
+          <a:p>
+            <a:pPr>
+              <a:lnSpc>
+                <a:spcPts val="2200"/>
+              </a:lnSpc>
+              <a:defRPr sz="2800" b="1">
+                <a:solidFill>
+                  <a:srgbClr val="1A1A2E"/>
+                </a:solidFill>
+                <a:latin typeface="Calibri"/>
+              </a:defRPr>
+            </a:pPr>
+            <a:r>
+              <a:t>Exercises</a:t>
+            </a:r>
+          </a:p>
+        </p:txBody>
+      </p:sp>
+      <p:sp>
+        <p:nvSpPr>
+          <p:cNvPr id="3" name="TextBox 2"/>
+          <p:cNvSpPr txBox="1"/>
+          <p:nvPr/>
+        </p:nvSpPr>
+        <p:spPr>
+          <a:xfrm>
+            <a:off x="548640" y="1234440"/>
+            <a:ext cx="11064240" cy="4937760"/>
+          </a:xfrm>
+          <a:prstGeom prst="rect">
+            <a:avLst/>
+          </a:prstGeom>
+          <a:noFill/>
+        </p:spPr>
+        <p:txBody>
+          <a:bodyPr wrap="square">
+            <a:noAutofit/>
+          </a:bodyPr>
+          <a:lstStyle/>
+          <a:p>
+            <a:pPr>
+              <a:lnSpc>
+                <a:spcPts val="2200"/>
+              </a:lnSpc>
+              <a:spcAft>
+                <a:spcPts val="1000"/>
+              </a:spcAft>
+              <a:defRPr sz="2000" b="0">
+                <a:solidFill>
+                  <a:srgbClr val="333333"/>
+                </a:solidFill>
+                <a:latin typeface="Calibri"/>
+              </a:defRPr>
+            </a:pPr>
+            <a:r>
+              <a:t>• Objections</a:t>
+            </a:r>
+          </a:p>
+        </p:txBody>
+      </p:sp>
+      <p:sp>
+        <p:nvSpPr>
+          <p:cNvPr id="4" name="TextBox 3"/>
+          <p:cNvSpPr txBox="1"/>
+          <p:nvPr/>
+        </p:nvSpPr>
+        <p:spPr>
+          <a:xfrm>
+            <a:off x="548640" y="6355080"/>
+            <a:ext cx="11064240" cy="320040"/>
+          </a:xfrm>
+          <a:prstGeom prst="rect">
+            <a:avLst/>
+          </a:prstGeom>
+          <a:noFill/>
+        </p:spPr>
+        <p:txBody>
+          <a:bodyPr wrap="square">
+            <a:noAutofit/>
+          </a:bodyPr>
+          <a:lstStyle/>
+          <a:p>
+            <a:pPr algn="r">
+              <a:lnSpc>
+                <a:spcPts val="2200"/>
+              </a:lnSpc>
+              <a:defRPr sz="1000" b="0">
+                <a:solidFill>
+                  <a:srgbClr val="666666"/>
+                </a:solidFill>
+                <a:latin typeface="Calibri"/>
+              </a:defRPr>
+            </a:pPr>
+            <a:r>
+              <a:t>learn_uvm2017_sv_verilator / Module 3</a:t>
+            </a:r>
+          </a:p>
+        </p:txBody>
+      </p:sp>
+    </p:spTree>
+  </p:cSld>
+  <p:clrMapOvr>
+    <a:masterClrMapping/>
+  </p:clrMapOvr>
+</p:sld>
+</file>
+
+<file path=ppt/slides/slide74.xml><?xml version="1.0" encoding="utf-8"?>
+<p:sld xmlns:a="http://schemas.openxmlformats.org/drawingml/2006/main" xmlns:p="http://schemas.openxmlformats.org/presentationml/2006/main" xmlns:r="http://schemas.openxmlformats.org/officeDocument/2006/relationships">
+  <p:cSld>
+    <p:spTree>
+      <p:nvGrpSpPr>
+        <p:cNvPr id="1" name=""/>
+        <p:cNvGrpSpPr/>
+        <p:nvPr/>
+      </p:nvGrpSpPr>
+      <p:grpSpPr/>
+      <p:sp>
+        <p:nvSpPr>
+          <p:cNvPr id="2" name="TextBox 1"/>
+          <p:cNvSpPr txBox="1"/>
+          <p:nvPr/>
+        </p:nvSpPr>
+        <p:spPr>
+          <a:xfrm>
+            <a:off x="548640" y="411480"/>
+            <a:ext cx="11064240" cy="777240"/>
+          </a:xfrm>
+          <a:prstGeom prst="rect">
+            <a:avLst/>
+          </a:prstGeom>
+          <a:noFill/>
+        </p:spPr>
+        <p:txBody>
+          <a:bodyPr wrap="square">
+            <a:noAutofit/>
+          </a:bodyPr>
+          <a:lstStyle/>
+          <a:p>
+            <a:pPr>
+              <a:lnSpc>
+                <a:spcPts val="2200"/>
+              </a:lnSpc>
+              <a:defRPr sz="2800" b="1">
+                <a:solidFill>
+                  <a:srgbClr val="1A1A2E"/>
+                </a:solidFill>
+                <a:latin typeface="Calibri"/>
+              </a:defRPr>
+            </a:pPr>
+            <a:r>
+              <a:t>Assessment checklist</a:t>
+            </a:r>
+          </a:p>
+        </p:txBody>
+      </p:sp>
+      <p:sp>
+        <p:nvSpPr>
+          <p:cNvPr id="3" name="TextBox 2"/>
+          <p:cNvSpPr txBox="1"/>
+          <p:nvPr/>
+        </p:nvSpPr>
+        <p:spPr>
+          <a:xfrm>
+            <a:off x="548640" y="1234440"/>
+            <a:ext cx="11064240" cy="4937760"/>
+          </a:xfrm>
+          <a:prstGeom prst="rect">
+            <a:avLst/>
+          </a:prstGeom>
+          <a:noFill/>
+        </p:spPr>
+        <p:txBody>
+          <a:bodyPr wrap="square">
+            <a:noAutofit/>
+          </a:bodyPr>
+          <a:lstStyle/>
+          <a:p>
+            <a:pPr>
+              <a:lnSpc>
+                <a:spcPts val="2200"/>
+              </a:lnSpc>
+              <a:spcAft>
+                <a:spcPts val="1000"/>
+              </a:spcAft>
+              <a:defRPr sz="2000" b="0">
+                <a:solidFill>
+                  <a:srgbClr val="333333"/>
+                </a:solidFill>
+                <a:latin typeface="Calibri"/>
+              </a:defRPr>
+            </a:pPr>
+            <a:r>
+              <a:t>• Understands UVM class hierarchy</a:t>
+            </a:r>
+          </a:p>
+          <a:p>
+            <a:pPr>
+              <a:lnSpc>
+                <a:spcPts val="2200"/>
+              </a:lnSpc>
+              <a:spcAft>
+                <a:spcPts val="1000"/>
+              </a:spcAft>
+              <a:defRPr sz="2000" b="0">
+                <a:solidFill>
+                  <a:srgbClr val="333333"/>
+                </a:solidFill>
+                <a:latin typeface="Calibri"/>
+              </a:defRPr>
+            </a:pPr>
+            <a:r>
+              <a:t>• Masters UVM phases</a:t>
+            </a:r>
+          </a:p>
+          <a:p>
+            <a:pPr>
+              <a:lnSpc>
+                <a:spcPts val="2200"/>
+              </a:lnSpc>
+              <a:spcAft>
+                <a:spcPts val="1000"/>
+              </a:spcAft>
+              <a:defRPr sz="2000" b="0">
+                <a:solidFill>
+                  <a:srgbClr val="333333"/>
+                </a:solidFill>
+                <a:latin typeface="Calibri"/>
+              </a:defRPr>
+            </a:pPr>
+            <a:r>
+              <a:t>• Uses UVM reporting effectively</a:t>
+            </a:r>
+          </a:p>
+          <a:p>
+            <a:pPr>
+              <a:lnSpc>
+                <a:spcPts val="2200"/>
+              </a:lnSpc>
+              <a:spcAft>
+                <a:spcPts val="1000"/>
+              </a:spcAft>
+              <a:defRPr sz="2000" b="0">
+                <a:solidFill>
+                  <a:srgbClr val="333333"/>
+                </a:solidFill>
+                <a:latin typeface="Calibri"/>
+              </a:defRPr>
+            </a:pPr>
+            <a:r>
+              <a:t>• Configures components using ConfigDB</a:t>
+            </a:r>
+          </a:p>
+          <a:p>
+            <a:pPr>
+              <a:lnSpc>
+                <a:spcPts val="2200"/>
+              </a:lnSpc>
+              <a:spcAft>
+                <a:spcPts val="1000"/>
+              </a:spcAft>
+              <a:defRPr sz="2000" b="0">
+                <a:solidFill>
+                  <a:srgbClr val="333333"/>
+                </a:solidFill>
+                <a:latin typeface="Calibri"/>
+              </a:defRPr>
+            </a:pPr>
+            <a:r>
+              <a:t>• Understands factory pattern</a:t>
+            </a:r>
+          </a:p>
+          <a:p>
+            <a:pPr>
+              <a:lnSpc>
+                <a:spcPts val="2200"/>
+              </a:lnSpc>
+              <a:spcAft>
+                <a:spcPts val="1000"/>
+              </a:spcAft>
+              <a:defRPr sz="2000" b="0">
+                <a:solidFill>
+                  <a:srgbClr val="333333"/>
+                </a:solidFill>
+                <a:latin typeface="Calibri"/>
+              </a:defRPr>
+            </a:pPr>
+            <a:r>
+              <a:t>• Controls simulation with objections</a:t>
+            </a:r>
+          </a:p>
+        </p:txBody>
+      </p:sp>
+      <p:sp>
+        <p:nvSpPr>
+          <p:cNvPr id="4" name="TextBox 3"/>
+          <p:cNvSpPr txBox="1"/>
+          <p:nvPr/>
+        </p:nvSpPr>
+        <p:spPr>
+          <a:xfrm>
+            <a:off x="548640" y="6355080"/>
+            <a:ext cx="11064240" cy="320040"/>
+          </a:xfrm>
+          <a:prstGeom prst="rect">
+            <a:avLst/>
+          </a:prstGeom>
+          <a:noFill/>
+        </p:spPr>
+        <p:txBody>
+          <a:bodyPr wrap="square">
+            <a:noAutofit/>
+          </a:bodyPr>
+          <a:lstStyle/>
+          <a:p>
+            <a:pPr algn="r">
+              <a:lnSpc>
+                <a:spcPts val="2200"/>
+              </a:lnSpc>
+              <a:defRPr sz="1000" b="0">
+                <a:solidFill>
+                  <a:srgbClr val="666666"/>
+                </a:solidFill>
+                <a:latin typeface="Calibri"/>
+              </a:defRPr>
+            </a:pPr>
+            <a:r>
+              <a:t>learn_uvm2017_sv_verilator / Module 3</a:t>
+            </a:r>
+          </a:p>
+        </p:txBody>
+      </p:sp>
+    </p:spTree>
+  </p:cSld>
+  <p:clrMapOvr>
+    <a:masterClrMapping/>
+  </p:clrMapOvr>
+</p:sld>
+</file>
+
+<file path=ppt/slides/slide75.xml><?xml version="1.0" encoding="utf-8"?>
+<p:sld xmlns:a="http://schemas.openxmlformats.org/drawingml/2006/main" xmlns:p="http://schemas.openxmlformats.org/presentationml/2006/main" xmlns:r="http://schemas.openxmlformats.org/officeDocument/2006/relationships">
+  <p:cSld>
+    <p:spTree>
+      <p:nvGrpSpPr>
+        <p:cNvPr id="1" name=""/>
+        <p:cNvGrpSpPr/>
+        <p:nvPr/>
+      </p:nvGrpSpPr>
+      <p:grpSpPr/>
+      <p:sp>
+        <p:nvSpPr>
+          <p:cNvPr id="2" name="TextBox 1"/>
+          <p:cNvSpPr txBox="1"/>
+          <p:nvPr/>
+        </p:nvSpPr>
+        <p:spPr>
+          <a:xfrm>
+            <a:off x="548640" y="411480"/>
+            <a:ext cx="11064240" cy="777240"/>
+          </a:xfrm>
+          <a:prstGeom prst="rect">
+            <a:avLst/>
+          </a:prstGeom>
+          <a:noFill/>
+        </p:spPr>
+        <p:txBody>
+          <a:bodyPr wrap="square">
+            <a:noAutofit/>
+          </a:bodyPr>
+          <a:lstStyle/>
+          <a:p>
+            <a:pPr>
+              <a:lnSpc>
+                <a:spcPts val="2200"/>
+              </a:lnSpc>
+              <a:defRPr sz="2800" b="1">
+                <a:solidFill>
+                  <a:srgbClr val="1A1A2E"/>
+                </a:solidFill>
+                <a:latin typeface="Calibri"/>
+              </a:defRPr>
+            </a:pPr>
+            <a:r>
+              <a:t>Summary &amp; next steps</a:t>
+            </a:r>
+          </a:p>
+        </p:txBody>
+      </p:sp>
+      <p:sp>
+        <p:nvSpPr>
+          <p:cNvPr id="3" name="TextBox 2"/>
+          <p:cNvSpPr txBox="1"/>
+          <p:nvPr/>
+        </p:nvSpPr>
+        <p:spPr>
+          <a:xfrm>
+            <a:off x="548640" y="1234440"/>
+            <a:ext cx="11064240" cy="4937760"/>
+          </a:xfrm>
+          <a:prstGeom prst="rect">
+            <a:avLst/>
+          </a:prstGeom>
+          <a:noFill/>
+        </p:spPr>
+        <p:txBody>
+          <a:bodyPr wrap="square">
+            <a:noAutofit/>
+          </a:bodyPr>
+          <a:lstStyle/>
+          <a:p>
+            <a:pPr>
+              <a:lnSpc>
+                <a:spcPts val="2200"/>
+              </a:lnSpc>
+              <a:spcAft>
+                <a:spcPts val="1000"/>
+              </a:spcAft>
+              <a:defRPr sz="2000" b="0">
+                <a:solidFill>
+                  <a:srgbClr val="333333"/>
+                </a:solidFill>
+                <a:latin typeface="Calibri"/>
+              </a:defRPr>
+            </a:pPr>
+            <a:r>
+              <a:t>• Master UVM class hierarchy and phases</a:t>
+            </a:r>
+          </a:p>
+          <a:p>
+            <a:pPr>
+              <a:lnSpc>
+                <a:spcPts val="2200"/>
+              </a:lnSpc>
+              <a:spcAft>
+                <a:spcPts val="1000"/>
+              </a:spcAft>
+              <a:defRPr sz="2000" b="0">
+                <a:solidFill>
+                  <a:srgbClr val="333333"/>
+                </a:solidFill>
+                <a:latin typeface="Calibri"/>
+              </a:defRPr>
+            </a:pPr>
+            <a:r>
+              <a:t>• Complete module3/CHECKLIST.md</a:t>
+            </a:r>
+          </a:p>
+          <a:p>
+            <a:pPr>
+              <a:lnSpc>
+                <a:spcPts val="2200"/>
+              </a:lnSpc>
+              <a:spcAft>
+                <a:spcPts val="1000"/>
+              </a:spcAft>
+              <a:defRPr sz="2000" b="0">
+                <a:solidFill>
+                  <a:srgbClr val="333333"/>
+                </a:solidFill>
+                <a:latin typeface="Calibri"/>
+              </a:defRPr>
+            </a:pPr>
+            <a:r>
+              <a:t>• Review module3/EXAMPLES.md and run each lab</a:t>
+            </a:r>
+          </a:p>
+          <a:p>
+            <a:pPr>
+              <a:lnSpc>
+                <a:spcPts val="2200"/>
+              </a:lnSpc>
+              <a:spcAft>
+                <a:spcPts val="1000"/>
+              </a:spcAft>
+              <a:defRPr sz="2000" b="0">
+                <a:solidFill>
+                  <a:srgbClr val="333333"/>
+                </a:solidFill>
+                <a:latin typeface="Calibri"/>
+              </a:defRPr>
+            </a:pPr>
+            <a:r>
+              <a:t>• Next: Next module in course</a:t>
             </a:r>
           </a:p>
         </p:txBody>
